--- a/content/decks/media-studies/media-studies-s1-lesson-13-the-creative-critical-reflection.pptx
+++ b/content/decks/media-studies/media-studies-s1-lesson-13-the-creative-critical-reflection.pptx
@@ -16,9 +16,11 @@
     <p:sldId id="264" r:id="rId10"/>
     <p:sldId id="265" r:id="rId11"/>
     <p:sldId id="266" r:id="rId12"/>
+    <p:sldId id="267" r:id="rId13"/>
+    <p:sldId id="268" r:id="rId14"/>
   </p:sldIdLst>
   <p:notesMasterIdLst>
-    <p:notesMasterId r:id="rId13"/>
+    <p:notesMasterId r:id="rId15"/>
   </p:notesMasterIdLst>
   <p:sldSz cx="12192000" cy="6858000"/>
   <p:notesSz cx="6858000" cy="12192000"/>
@@ -600,7 +602,7 @@
           <a:p>
             <a:r>
               <a:rPr lang="en-US" dirty="0"/>
-              <a:t/>
+              <a:t>The surgery sheet is ten sentences, PROPOSED; the banned sentence is any variant of aimed at young people aged 15 to 25.</a:t>
             </a:r>
             <a:endParaRPr lang="en-US" dirty="0"/>
           </a:p>
@@ -688,7 +690,7 @@
           <a:p>
             <a:r>
               <a:rPr lang="en-US" dirty="0"/>
-              <a:t/>
+              <a:t>Both exemplars live on the School Support Hub (URLs in the plan's sources; teacher login). Candidate B's CCR strand was the only strand off the top band. This is the plan's strongest teacher note, now on a slide; the format spread is a hard requirement at D1.</a:t>
             </a:r>
             <a:endParaRPr lang="en-US" dirty="0"/>
           </a:p>
@@ -712,6 +714,182 @@
             <a:fld id="{F7021451-1387-4CA6-816F-3879F97B5CBC}" type="slidenum">
               <a:rPr lang="en-US"/>
               <a:t>11</a:t>
+            </a:fld>
+            <a:endParaRPr lang="en-US"/>
+          </a:p>
+        </p:txBody>
+      </p:sp>
+    </p:spTree>
+    <p:extLst>
+      <p:ext uri="{BB962C8B-B14F-4D97-AF65-F5344CB8AC3E}">
+        <p14:creationId xmlns:p14="http://schemas.microsoft.com/office/powerpoint/2010/main" val="1024086991"/>
+      </p:ext>
+    </p:extLst>
+  </p:cSld>
+  <p:clrMapOvr>
+    <a:masterClrMapping/>
+  </p:clrMapOvr>
+</p:notes>
+</file>
+
+<file path=ppt/notesSlides/notesSlide12.xml><?xml version="1.0" encoding="utf-8"?>
+<p:notes xmlns:a="http://schemas.openxmlformats.org/drawingml/2006/main" xmlns:r="http://schemas.openxmlformats.org/officeDocument/2006/relationships" xmlns:p="http://schemas.openxmlformats.org/presentationml/2006/main">
+  <p:cSld>
+    <p:spTree>
+      <p:nvGrpSpPr>
+        <p:cNvPr id="1" name=""/>
+        <p:cNvGrpSpPr/>
+        <p:nvPr/>
+      </p:nvGrpSpPr>
+      <p:grpSpPr>
+        <a:xfrm>
+          <a:off x="0" y="0"/>
+          <a:ext cx="0" cy="0"/>
+          <a:chOff x="0" y="0"/>
+          <a:chExt cx="0" cy="0"/>
+        </a:xfrm>
+      </p:grpSpPr>
+      <p:sp>
+        <p:nvSpPr>
+          <p:cNvPr id="2" name="Slide Image Placeholder 1"/>
+          <p:cNvSpPr>
+            <a:spLocks noGrp="1" noRot="1" noChangeAspect="1"/>
+          </p:cNvSpPr>
+          <p:nvPr>
+            <p:ph type="sldImg"/>
+          </p:nvPr>
+        </p:nvSpPr>
+        <p:spPr/>
+      </p:sp>
+      <p:sp>
+        <p:nvSpPr>
+          <p:cNvPr id="3" name="Notes Placeholder 2"/>
+          <p:cNvSpPr>
+            <a:spLocks noGrp="1"/>
+          </p:cNvSpPr>
+          <p:nvPr>
+            <p:ph type="body" idx="1"/>
+          </p:nvPr>
+        </p:nvSpPr>
+        <p:spPr/>
+        <p:txBody>
+          <a:bodyPr/>
+          <a:lstStyle/>
+          <a:p>
+            <a:r>
+              <a:rPr lang="en-US" dirty="0"/>
+              <a:t>Review protocol runs Deck U6.1's Lerman-style structure. The criteria page on screen is the syllabus's own; the review is conducted in its language so A3's marking holds no surprises.</a:t>
+            </a:r>
+            <a:endParaRPr lang="en-US" dirty="0"/>
+          </a:p>
+        </p:txBody>
+      </p:sp>
+      <p:sp>
+        <p:nvSpPr>
+          <p:cNvPr id="4" name="Slide Number Placeholder 3"/>
+          <p:cNvSpPr>
+            <a:spLocks noGrp="1"/>
+          </p:cNvSpPr>
+          <p:nvPr>
+            <p:ph type="sldNum" sz="quarter" idx="10"/>
+          </p:nvPr>
+        </p:nvSpPr>
+        <p:spPr/>
+        <p:txBody>
+          <a:bodyPr/>
+          <a:lstStyle/>
+          <a:p>
+            <a:fld id="{F7021451-1387-4CA6-816F-3879F97B5CBC}" type="slidenum">
+              <a:rPr lang="en-US"/>
+              <a:t>12</a:t>
+            </a:fld>
+            <a:endParaRPr lang="en-US"/>
+          </a:p>
+        </p:txBody>
+      </p:sp>
+    </p:spTree>
+    <p:extLst>
+      <p:ext uri="{BB962C8B-B14F-4D97-AF65-F5344CB8AC3E}">
+        <p14:creationId xmlns:p14="http://schemas.microsoft.com/office/powerpoint/2010/main" val="1024086991"/>
+      </p:ext>
+    </p:extLst>
+  </p:cSld>
+  <p:clrMapOvr>
+    <a:masterClrMapping/>
+  </p:clrMapOvr>
+</p:notes>
+</file>
+
+<file path=ppt/notesSlides/notesSlide13.xml><?xml version="1.0" encoding="utf-8"?>
+<p:notes xmlns:a="http://schemas.openxmlformats.org/drawingml/2006/main" xmlns:r="http://schemas.openxmlformats.org/officeDocument/2006/relationships" xmlns:p="http://schemas.openxmlformats.org/presentationml/2006/main">
+  <p:cSld>
+    <p:spTree>
+      <p:nvGrpSpPr>
+        <p:cNvPr id="1" name=""/>
+        <p:cNvGrpSpPr/>
+        <p:nvPr/>
+      </p:nvGrpSpPr>
+      <p:grpSpPr>
+        <a:xfrm>
+          <a:off x="0" y="0"/>
+          <a:ext cx="0" cy="0"/>
+          <a:chOff x="0" y="0"/>
+          <a:chExt cx="0" cy="0"/>
+        </a:xfrm>
+      </p:grpSpPr>
+      <p:sp>
+        <p:nvSpPr>
+          <p:cNvPr id="2" name="Slide Image Placeholder 1"/>
+          <p:cNvSpPr>
+            <a:spLocks noGrp="1" noRot="1" noChangeAspect="1"/>
+          </p:cNvSpPr>
+          <p:nvPr>
+            <p:ph type="sldImg"/>
+          </p:nvPr>
+        </p:nvSpPr>
+        <p:spPr/>
+      </p:sp>
+      <p:sp>
+        <p:nvSpPr>
+          <p:cNvPr id="3" name="Notes Placeholder 2"/>
+          <p:cNvSpPr>
+            <a:spLocks noGrp="1"/>
+          </p:cNvSpPr>
+          <p:nvPr>
+            <p:ph type="body" idx="1"/>
+          </p:nvPr>
+        </p:nvSpPr>
+        <p:spPr/>
+        <p:txBody>
+          <a:bodyPr/>
+          <a:lstStyle/>
+          <a:p>
+            <a:r>
+              <a:rPr lang="en-US" dirty="0"/>
+              <a:t/>
+            </a:r>
+            <a:endParaRPr lang="en-US" dirty="0"/>
+          </a:p>
+        </p:txBody>
+      </p:sp>
+      <p:sp>
+        <p:nvSpPr>
+          <p:cNvPr id="4" name="Slide Number Placeholder 3"/>
+          <p:cNvSpPr>
+            <a:spLocks noGrp="1"/>
+          </p:cNvSpPr>
+          <p:nvPr>
+            <p:ph type="sldNum" sz="quarter" idx="10"/>
+          </p:nvPr>
+        </p:nvSpPr>
+        <p:spPr/>
+        <p:txBody>
+          <a:bodyPr/>
+          <a:lstStyle/>
+          <a:p>
+            <a:fld id="{F7021451-1387-4CA6-816F-3879F97B5CBC}" type="slidenum">
+              <a:rPr lang="en-US"/>
+              <a:t>13</a:t>
             </a:fld>
             <a:endParaRPr lang="en-US"/>
           </a:p>
@@ -864,7 +1042,7 @@
           <a:p>
             <a:r>
               <a:rPr lang="en-US" dirty="0"/>
-              <a:t/>
+              <a:t>The syllabus wording sits behind these student-language versions; the plan issues them EN/ZH, which is the next slide.</a:t>
             </a:r>
             <a:endParaRPr lang="en-US" dirty="0"/>
           </a:p>
@@ -952,7 +1130,7 @@
           <a:p>
             <a:r>
               <a:rPr lang="en-US" dirty="0"/>
-              <a:t/>
+              <a:t>The plan promises the four questions issued in student language, EN/ZH; both slides go on the wall. Both languages are legitimate in the room; the CCR itself is written in English.</a:t>
             </a:r>
             <a:endParaRPr lang="en-US" dirty="0"/>
           </a:p>
@@ -1128,7 +1306,7 @@
           <a:p>
             <a:r>
               <a:rPr lang="en-US" dirty="0"/>
-              <a:t>The maker examining himself. One honest sentence per draft keeps out the promotional voice, which examiners read as description.</a:t>
+              <a:t>The maxim is ours, not a quotation; it runs the sentence surgery and the CS11 review alike.</a:t>
             </a:r>
             <a:endParaRPr lang="en-US" dirty="0"/>
           </a:p>
@@ -1216,7 +1394,7 @@
           <a:p>
             <a:r>
               <a:rPr lang="en-US" dirty="0"/>
-              <a:t/>
+              <a:t>Restored 2026-08-24: the lesson names Rivera's 1907 self-portrait, replaced by Van Gogh in July only because the library scan was too small; a larger scan is now in img/. Update CREDITS if this ships.</a:t>
             </a:r>
             <a:endParaRPr lang="en-US" dirty="0"/>
           </a:p>
@@ -1304,7 +1482,7 @@
           <a:p>
             <a:r>
               <a:rPr lang="en-US" dirty="0"/>
-              <a:t/>
+              <a:t>The lock was L07 (the old slide said L05, a pre-rebuild residue). The Q1 evidence base also includes the L11 stereotype-audit findings: a fixed stereotype is a reflection sentence waiting to happen.</a:t>
             </a:r>
             <a:endParaRPr lang="en-US" dirty="0"/>
           </a:p>
@@ -2071,7 +2249,7 @@
                 <a:ea typeface="Arial" pitchFamily="34" charset="-122"/>
                 <a:cs typeface="Arial" pitchFamily="34" charset="-120"/>
               </a:rPr>
-              <a:t>DELIVERABLE · CS11</a:t>
+              <a:t>SENTENCE SURGERY</a:t>
             </a:r>
             <a:endParaRPr lang="en-US" sz="1100" dirty="0"/>
           </a:p>
@@ -2110,7 +2288,7 @@
                 <a:ea typeface="Arial" pitchFamily="34" charset="-122"/>
                 <a:cs typeface="Arial" pitchFamily="34" charset="-120"/>
               </a:rPr>
-              <a:t>DIRECT PRACTICE FOR A3</a:t>
+              <a:t>RUN THE TEST ON YOUR OWN DRAFT</a:t>
             </a:r>
             <a:endParaRPr lang="en-US" sz="1100" dirty="0"/>
           </a:p>
@@ -2147,8 +2325,8 @@
         </p:nvSpPr>
         <p:spPr>
           <a:xfrm>
-            <a:off x="822960" y="1280160"/>
-            <a:ext cx="10543032" cy="914400"/>
+            <a:off x="822960" y="1005840"/>
+            <a:ext cx="10543032" cy="731520"/>
           </a:xfrm>
           <a:prstGeom prst="rect">
             <a:avLst/>
@@ -2164,7 +2342,7 @@
               <a:buNone/>
             </a:pPr>
             <a:r>
-              <a:rPr lang="en-US" sz="3200" dirty="0">
+              <a:rPr lang="en-US" sz="3400" dirty="0">
                 <a:solidFill>
                   <a:srgbClr val="24313F"/>
                 </a:solidFill>
@@ -2172,30 +2350,71 @@
                 <a:ea typeface="Georgia" pitchFamily="34" charset="-122"/>
                 <a:cs typeface="Georgia" pitchFamily="34" charset="-120"/>
               </a:rPr>
-              <a:t>Reviewed against the real C1 criteria</a:t>
-            </a:r>
-            <a:endParaRPr lang="en-US" sz="3200" dirty="0"/>
-          </a:p>
-        </p:txBody>
-      </p:sp>
-      <p:sp>
-        <p:nvSpPr>
-          <p:cNvPr id="6" name="Shape 4"/>
-          <p:cNvSpPr/>
-          <p:nvPr/>
-        </p:nvSpPr>
-        <p:spPr>
-          <a:xfrm>
-            <a:off x="822960" y="2423160"/>
-            <a:ext cx="914400" cy="0"/>
-          </a:xfrm>
-          <a:prstGeom prst="line">
-            <a:avLst/>
-          </a:prstGeom>
-          <a:noFill/>
-          <a:ln w="31750">
+              <a:t>One sentence, operated on</a:t>
+            </a:r>
+            <a:endParaRPr lang="en-US" sz="3400" dirty="0"/>
+          </a:p>
+        </p:txBody>
+      </p:sp>
+      <p:sp>
+        <p:nvSpPr>
+          <p:cNvPr id="6" name="Text 4"/>
+          <p:cNvSpPr/>
+          <p:nvPr/>
+        </p:nvSpPr>
+        <p:spPr>
+          <a:xfrm>
+            <a:off x="822960" y="1965960"/>
+            <a:ext cx="4846320" cy="365760"/>
+          </a:xfrm>
+          <a:prstGeom prst="rect">
+            <a:avLst/>
+          </a:prstGeom>
+          <a:noFill/>
+          <a:ln/>
+        </p:spPr>
+        <p:txBody>
+          <a:bodyPr wrap="square" lIns="0" tIns="0" rIns="0" bIns="0" rtlCol="0" anchor="ctr"/>
+          <a:lstStyle/>
+          <a:p>
+            <a:pPr indent="0" marL="0">
+              <a:buNone/>
+            </a:pPr>
+            <a:r>
+              <a:rPr lang="en-US" sz="1100" b="1" spc="150" kern="0" dirty="0">
+                <a:solidFill>
+                  <a:srgbClr val="7A7F72"/>
+                </a:solidFill>
+                <a:latin typeface="Arial" pitchFamily="34" charset="0"/>
+                <a:ea typeface="Arial" pitchFamily="34" charset="-122"/>
+                <a:cs typeface="Arial" pitchFamily="34" charset="-120"/>
+              </a:rPr>
+              <a:t>BEFORE  ·  describes</a:t>
+            </a:r>
+            <a:endParaRPr lang="en-US" sz="1100" dirty="0"/>
+          </a:p>
+        </p:txBody>
+      </p:sp>
+      <p:sp>
+        <p:nvSpPr>
+          <p:cNvPr id="7" name="Shape 5"/>
+          <p:cNvSpPr/>
+          <p:nvPr/>
+        </p:nvSpPr>
+        <p:spPr>
+          <a:xfrm>
+            <a:off x="822960" y="2331720"/>
+            <a:ext cx="4846320" cy="1554480"/>
+          </a:xfrm>
+          <a:prstGeom prst="rect">
+            <a:avLst/>
+          </a:prstGeom>
+          <a:solidFill>
+            <a:srgbClr val="FAF8F1"/>
+          </a:solidFill>
+          <a:ln w="12700">
             <a:solidFill>
-              <a:srgbClr val="8C3A38"/>
+              <a:srgbClr val="D9D4C4"/>
             </a:solidFill>
             <a:prstDash val="solid"/>
           </a:ln>
@@ -2203,14 +2422,14 @@
       </p:sp>
       <p:sp>
         <p:nvSpPr>
-          <p:cNvPr id="7" name="Text 5"/>
-          <p:cNvSpPr/>
-          <p:nvPr/>
-        </p:nvSpPr>
-        <p:spPr>
-          <a:xfrm>
-            <a:off x="822960" y="2651760"/>
-            <a:ext cx="9875520" cy="2103120"/>
+          <p:cNvPr id="8" name="Text 6"/>
+          <p:cNvSpPr/>
+          <p:nvPr/>
+        </p:nvSpPr>
+        <p:spPr>
+          <a:xfrm>
+            <a:off x="1051560" y="2468880"/>
+            <a:ext cx="4389120" cy="1280160"/>
           </a:xfrm>
           <a:prstGeom prst="rect">
             <a:avLst/>
@@ -2224,35 +2443,35 @@
           <a:p>
             <a:pPr indent="0" marL="0">
               <a:lnSpc>
-                <a:spcPts val="2700"/>
+                <a:spcPts val="2300"/>
               </a:lnSpc>
               <a:buNone/>
             </a:pPr>
             <a:r>
-              <a:rPr lang="en-US" sz="1900" dirty="0">
-                <a:solidFill>
-                  <a:srgbClr val="24313F"/>
+              <a:rPr lang="en-US" sz="1700" dirty="0">
+                <a:solidFill>
+                  <a:srgbClr val="7A7F72"/>
                 </a:solidFill>
                 <a:latin typeface="Georgia" pitchFamily="34" charset="0"/>
                 <a:ea typeface="Georgia" pitchFamily="34" charset="-122"/>
                 <a:cs typeface="Georgia" pitchFamily="34" charset="-120"/>
               </a:rPr>
-              <a:t>Full drafts reviewed by teacher and peers in the C1 criteria's own language: describe, question, suggest. Every draft leaves with a written action list. The format is chosen by Friday from the coursebook menu, director's commentary, voiceover, podcast, or screencast, and presented creatively using technology is a requirement, not a suggestion.</a:t>
-            </a:r>
-            <a:endParaRPr lang="en-US" sz="1900" dirty="0"/>
-          </a:p>
-        </p:txBody>
-      </p:sp>
-      <p:sp>
-        <p:nvSpPr>
-          <p:cNvPr id="8" name="Text 6"/>
-          <p:cNvSpPr/>
-          <p:nvPr/>
-        </p:nvSpPr>
-        <p:spPr>
-          <a:xfrm>
-            <a:off x="822960" y="4892040"/>
-            <a:ext cx="9875520" cy="457200"/>
+              <a:t>We filmed the scene in the car park and then edited it together.</a:t>
+            </a:r>
+            <a:endParaRPr lang="en-US" sz="1700" dirty="0"/>
+          </a:p>
+        </p:txBody>
+      </p:sp>
+      <p:sp>
+        <p:nvSpPr>
+          <p:cNvPr id="9" name="Text 7"/>
+          <p:cNvSpPr/>
+          <p:nvPr/>
+        </p:nvSpPr>
+        <p:spPr>
+          <a:xfrm>
+            <a:off x="5760720" y="2651760"/>
+            <a:ext cx="548640" cy="914400"/>
           </a:xfrm>
           <a:prstGeom prst="rect">
             <a:avLst/>
@@ -2264,27 +2483,211 @@
           <a:bodyPr wrap="square" lIns="0" tIns="0" rIns="0" bIns="0" rtlCol="0" anchor="ctr"/>
           <a:lstStyle/>
           <a:p>
+            <a:pPr algn="ctr" indent="0" marL="0">
+              <a:buNone/>
+            </a:pPr>
+            <a:r>
+              <a:rPr lang="en-US" sz="3400" dirty="0">
+                <a:solidFill>
+                  <a:srgbClr val="A3C1AD"/>
+                </a:solidFill>
+                <a:latin typeface="Georgia" pitchFamily="34" charset="0"/>
+                <a:ea typeface="Georgia" pitchFamily="34" charset="-122"/>
+                <a:cs typeface="Georgia" pitchFamily="34" charset="-120"/>
+              </a:rPr>
+              <a:t>→</a:t>
+            </a:r>
+            <a:endParaRPr lang="en-US" sz="3400" dirty="0"/>
+          </a:p>
+        </p:txBody>
+      </p:sp>
+      <p:sp>
+        <p:nvSpPr>
+          <p:cNvPr id="10" name="Text 8"/>
+          <p:cNvSpPr/>
+          <p:nvPr/>
+        </p:nvSpPr>
+        <p:spPr>
+          <a:xfrm>
+            <a:off x="6492240" y="1965960"/>
+            <a:ext cx="4846320" cy="365760"/>
+          </a:xfrm>
+          <a:prstGeom prst="rect">
+            <a:avLst/>
+          </a:prstGeom>
+          <a:noFill/>
+          <a:ln/>
+        </p:spPr>
+        <p:txBody>
+          <a:bodyPr wrap="square" lIns="0" tIns="0" rIns="0" bIns="0" rtlCol="0" anchor="ctr"/>
+          <a:lstStyle/>
+          <a:p>
             <a:pPr indent="0" marL="0">
               <a:buNone/>
             </a:pPr>
             <a:r>
-              <a:rPr lang="en-US" sz="1300" i="1" dirty="0">
-                <a:solidFill>
-                  <a:srgbClr val="7A7F72"/>
+              <a:rPr lang="en-US" sz="1100" b="1" spc="150" kern="0" dirty="0">
+                <a:solidFill>
+                  <a:srgbClr val="4A6B5D"/>
                 </a:solidFill>
                 <a:latin typeface="Arial" pitchFamily="34" charset="0"/>
                 <a:ea typeface="Arial" pitchFamily="34" charset="-122"/>
                 <a:cs typeface="Arial" pitchFamily="34" charset="-120"/>
               </a:rPr>
-              <a:t>This cohort's CCR is the blog-era, four-question, creative-format artifact, coursebook 6.7.</a:t>
-            </a:r>
-            <a:endParaRPr lang="en-US" sz="1300" dirty="0"/>
-          </a:p>
-        </p:txBody>
-      </p:sp>
-      <p:sp>
-        <p:nvSpPr>
-          <p:cNvPr id="9" name="Shape 7"/>
+              <a:t>AFTER  ·  reflects</a:t>
+            </a:r>
+            <a:endParaRPr lang="en-US" sz="1100" dirty="0"/>
+          </a:p>
+        </p:txBody>
+      </p:sp>
+      <p:sp>
+        <p:nvSpPr>
+          <p:cNvPr id="11" name="Shape 9"/>
+          <p:cNvSpPr/>
+          <p:nvPr/>
+        </p:nvSpPr>
+        <p:spPr>
+          <a:xfrm>
+            <a:off x="6492240" y="2331720"/>
+            <a:ext cx="4846320" cy="1554480"/>
+          </a:xfrm>
+          <a:prstGeom prst="rect">
+            <a:avLst/>
+          </a:prstGeom>
+          <a:solidFill>
+            <a:srgbClr val="E8EFE7"/>
+          </a:solidFill>
+          <a:ln w="12700">
+            <a:solidFill>
+              <a:srgbClr val="8AA394"/>
+            </a:solidFill>
+            <a:prstDash val="solid"/>
+          </a:ln>
+        </p:spPr>
+      </p:sp>
+      <p:sp>
+        <p:nvSpPr>
+          <p:cNvPr id="12" name="Text 10"/>
+          <p:cNvSpPr/>
+          <p:nvPr/>
+        </p:nvSpPr>
+        <p:spPr>
+          <a:xfrm>
+            <a:off x="6720840" y="2450592"/>
+            <a:ext cx="4434840" cy="1371600"/>
+          </a:xfrm>
+          <a:prstGeom prst="rect">
+            <a:avLst/>
+          </a:prstGeom>
+          <a:noFill/>
+          <a:ln/>
+        </p:spPr>
+        <p:txBody>
+          <a:bodyPr wrap="square" lIns="0" tIns="0" rIns="0" bIns="0" rtlCol="0" anchor="t"/>
+          <a:lstStyle/>
+          <a:p>
+            <a:pPr indent="0" marL="0">
+              <a:lnSpc>
+                <a:spcPts val="2000"/>
+              </a:lnSpc>
+              <a:buNone/>
+            </a:pPr>
+            <a:r>
+              <a:rPr lang="en-US" sz="1550" dirty="0">
+                <a:solidFill>
+                  <a:srgbClr val="24313F"/>
+                </a:solidFill>
+                <a:latin typeface="Georgia" pitchFamily="34" charset="0"/>
+                <a:ea typeface="Georgia" pitchFamily="34" charset="-122"/>
+                <a:cs typeface="Georgia" pitchFamily="34" charset="-120"/>
+              </a:rPr>
+              <a:t>We chose the car park because it was the only free location, and the flat light shows in the grade; next time we would scout for contrast.</a:t>
+            </a:r>
+            <a:endParaRPr lang="en-US" sz="1550" dirty="0"/>
+          </a:p>
+        </p:txBody>
+      </p:sp>
+      <p:sp>
+        <p:nvSpPr>
+          <p:cNvPr id="13" name="Text 11"/>
+          <p:cNvSpPr/>
+          <p:nvPr/>
+        </p:nvSpPr>
+        <p:spPr>
+          <a:xfrm>
+            <a:off x="822960" y="4297680"/>
+            <a:ext cx="10543032" cy="457200"/>
+          </a:xfrm>
+          <a:prstGeom prst="rect">
+            <a:avLst/>
+          </a:prstGeom>
+          <a:noFill/>
+          <a:ln/>
+        </p:spPr>
+        <p:txBody>
+          <a:bodyPr wrap="square" lIns="0" tIns="0" rIns="0" bIns="0" rtlCol="0" anchor="ctr"/>
+          <a:lstStyle/>
+          <a:p>
+            <a:pPr indent="0" marL="0">
+              <a:buNone/>
+            </a:pPr>
+            <a:r>
+              <a:rPr lang="en-US" sz="1700" i="1" dirty="0">
+                <a:solidFill>
+                  <a:srgbClr val="4A6B5D"/>
+                </a:solidFill>
+                <a:latin typeface="Georgia" pitchFamily="34" charset="0"/>
+                <a:ea typeface="Georgia" pitchFamily="34" charset="-122"/>
+                <a:cs typeface="Georgia" pitchFamily="34" charset="-120"/>
+              </a:rPr>
+              <a:t>Same event. One names a decision, a reason, and a change. That is the whole surgery.</a:t>
+            </a:r>
+            <a:endParaRPr lang="en-US" sz="1700" dirty="0"/>
+          </a:p>
+        </p:txBody>
+      </p:sp>
+      <p:sp>
+        <p:nvSpPr>
+          <p:cNvPr id="14" name="Text 12"/>
+          <p:cNvSpPr/>
+          <p:nvPr/>
+        </p:nvSpPr>
+        <p:spPr>
+          <a:xfrm>
+            <a:off x="822960" y="4892040"/>
+            <a:ext cx="10543032" cy="365760"/>
+          </a:xfrm>
+          <a:prstGeom prst="rect">
+            <a:avLst/>
+          </a:prstGeom>
+          <a:noFill/>
+          <a:ln/>
+        </p:spPr>
+        <p:txBody>
+          <a:bodyPr wrap="square" lIns="0" tIns="0" rIns="0" bIns="0" rtlCol="0" anchor="ctr"/>
+          <a:lstStyle/>
+          <a:p>
+            <a:pPr indent="0" marL="0">
+              <a:buNone/>
+            </a:pPr>
+            <a:r>
+              <a:rPr lang="en-US" sz="1250" i="1" dirty="0">
+                <a:solidFill>
+                  <a:srgbClr val="7A7F72"/>
+                </a:solidFill>
+                <a:latin typeface="Arial" pitchFamily="34" charset="0"/>
+                <a:ea typeface="Arial" pitchFamily="34" charset="-122"/>
+                <a:cs typeface="Arial" pitchFamily="34" charset="-120"/>
+              </a:rPr>
+              <a:t>The surgery closes with format speed-pitches: 60 seconds each in fours, the four votes, format finalized.</a:t>
+            </a:r>
+            <a:endParaRPr lang="en-US" sz="1250" dirty="0"/>
+          </a:p>
+        </p:txBody>
+      </p:sp>
+      <p:sp>
+        <p:nvSpPr>
+          <p:cNvPr id="15" name="Shape 13"/>
           <p:cNvSpPr/>
           <p:nvPr/>
         </p:nvSpPr>
@@ -2307,7 +2710,7 @@
       </p:sp>
       <p:sp>
         <p:nvSpPr>
-          <p:cNvPr id="10" name="Text 8"/>
+          <p:cNvPr id="16" name="Text 14"/>
           <p:cNvSpPr/>
           <p:nvPr/>
         </p:nvSpPr>
@@ -2346,7 +2749,7 @@
       </p:sp>
       <p:sp>
         <p:nvSpPr>
-          <p:cNvPr id="11" name="Text 9"/>
+          <p:cNvPr id="17" name="Text 15"/>
           <p:cNvSpPr/>
           <p:nvPr/>
         </p:nvSpPr>
@@ -2394,6 +2797,1102 @@
 <file path=ppt/slides/slide11.xml><?xml version="1.0" encoding="utf-8"?>
 <p:sld xmlns:a="http://schemas.openxmlformats.org/drawingml/2006/main" xmlns:r="http://schemas.openxmlformats.org/officeDocument/2006/relationships" xmlns:p="http://schemas.openxmlformats.org/presentationml/2006/main">
   <p:cSld name="Slide 11">
+    <p:bg>
+      <p:bgPr>
+        <a:solidFill>
+          <a:srgbClr val="FAF8F1"/>
+        </a:solidFill>
+      </p:bgPr>
+    </p:bg>
+    <p:spTree>
+      <p:nvGrpSpPr>
+        <p:cNvPr id="1" name=""/>
+        <p:cNvGrpSpPr/>
+        <p:nvPr/>
+      </p:nvGrpSpPr>
+      <p:grpSpPr>
+        <a:xfrm>
+          <a:off x="0" y="0"/>
+          <a:ext cx="0" cy="0"/>
+          <a:chOff x="0" y="0"/>
+          <a:chExt cx="0" cy="0"/>
+        </a:xfrm>
+      </p:grpSpPr>
+      <p:sp>
+        <p:nvSpPr>
+          <p:cNvPr id="2" name="Text 0"/>
+          <p:cNvSpPr/>
+          <p:nvPr/>
+        </p:nvSpPr>
+        <p:spPr>
+          <a:xfrm>
+            <a:off x="822960" y="457200"/>
+            <a:ext cx="6400800" cy="274320"/>
+          </a:xfrm>
+          <a:prstGeom prst="rect">
+            <a:avLst/>
+          </a:prstGeom>
+          <a:noFill/>
+          <a:ln/>
+        </p:spPr>
+        <p:txBody>
+          <a:bodyPr wrap="square" lIns="0" tIns="0" rIns="0" bIns="0" rtlCol="0" anchor="ctr"/>
+          <a:lstStyle/>
+          <a:p>
+            <a:pPr algn="l" indent="0" marL="0">
+              <a:buNone/>
+            </a:pPr>
+            <a:r>
+              <a:rPr lang="en-US" sz="1100" b="1" spc="250" kern="0" dirty="0">
+                <a:solidFill>
+                  <a:srgbClr val="4A6B5D"/>
+                </a:solidFill>
+                <a:latin typeface="Arial" pitchFamily="34" charset="0"/>
+                <a:ea typeface="Arial" pitchFamily="34" charset="-122"/>
+                <a:cs typeface="Arial" pitchFamily="34" charset="-120"/>
+              </a:rPr>
+              <a:t>ONE TOOL IS NOT ENOUGH</a:t>
+            </a:r>
+            <a:endParaRPr lang="en-US" sz="1100" dirty="0"/>
+          </a:p>
+        </p:txBody>
+      </p:sp>
+      <p:sp>
+        <p:nvSpPr>
+          <p:cNvPr id="3" name="Text 1"/>
+          <p:cNvSpPr/>
+          <p:nvPr/>
+        </p:nvSpPr>
+        <p:spPr>
+          <a:xfrm>
+            <a:off x="6793992" y="457200"/>
+            <a:ext cx="4572000" cy="274320"/>
+          </a:xfrm>
+          <a:prstGeom prst="rect">
+            <a:avLst/>
+          </a:prstGeom>
+          <a:noFill/>
+          <a:ln/>
+        </p:spPr>
+        <p:txBody>
+          <a:bodyPr wrap="square" lIns="0" tIns="0" rIns="0" bIns="0" rtlCol="0" anchor="ctr"/>
+          <a:lstStyle/>
+          <a:p>
+            <a:pPr algn="r" indent="0" marL="0">
+              <a:buNone/>
+            </a:pPr>
+            <a:r>
+              <a:rPr lang="en-US" sz="1100" b="1" spc="250" kern="0" dirty="0">
+                <a:solidFill>
+                  <a:srgbClr val="7A7F72"/>
+                </a:solidFill>
+                <a:latin typeface="Arial" pitchFamily="34" charset="0"/>
+                <a:ea typeface="Arial" pitchFamily="34" charset="-122"/>
+                <a:cs typeface="Arial" pitchFamily="34" charset="-120"/>
+              </a:rPr>
+              <a:t>CAMBRIDGE'S TWO PUBLISHED C1 EXEMPLARS</a:t>
+            </a:r>
+            <a:endParaRPr lang="en-US" sz="1100" dirty="0"/>
+          </a:p>
+        </p:txBody>
+      </p:sp>
+      <p:sp>
+        <p:nvSpPr>
+          <p:cNvPr id="4" name="Shape 2"/>
+          <p:cNvSpPr/>
+          <p:nvPr/>
+        </p:nvSpPr>
+        <p:spPr>
+          <a:xfrm>
+            <a:off x="822960" y="786384"/>
+            <a:ext cx="10543032" cy="0"/>
+          </a:xfrm>
+          <a:prstGeom prst="line">
+            <a:avLst/>
+          </a:prstGeom>
+          <a:noFill/>
+          <a:ln w="9525">
+            <a:solidFill>
+              <a:srgbClr val="D9D4C4"/>
+            </a:solidFill>
+            <a:prstDash val="solid"/>
+          </a:ln>
+        </p:spPr>
+      </p:sp>
+      <p:sp>
+        <p:nvSpPr>
+          <p:cNvPr id="5" name="Text 3"/>
+          <p:cNvSpPr/>
+          <p:nvPr/>
+        </p:nvSpPr>
+        <p:spPr>
+          <a:xfrm>
+            <a:off x="822960" y="960120"/>
+            <a:ext cx="10543032" cy="640080"/>
+          </a:xfrm>
+          <a:prstGeom prst="rect">
+            <a:avLst/>
+          </a:prstGeom>
+          <a:noFill/>
+          <a:ln/>
+        </p:spPr>
+        <p:txBody>
+          <a:bodyPr wrap="square" lIns="0" tIns="0" rIns="0" bIns="0" rtlCol="0" anchor="ctr"/>
+          <a:lstStyle/>
+          <a:p>
+            <a:pPr indent="0" marL="0">
+              <a:buNone/>
+            </a:pPr>
+            <a:r>
+              <a:rPr lang="en-US" sz="2800" dirty="0">
+                <a:solidFill>
+                  <a:srgbClr val="24313F"/>
+                </a:solidFill>
+                <a:latin typeface="Georgia" pitchFamily="34" charset="0"/>
+                <a:ea typeface="Georgia" pitchFamily="34" charset="-122"/>
+                <a:cs typeface="Georgia" pitchFamily="34" charset="-120"/>
+              </a:rPr>
+              <a:t>The moderators wrote the same criticism twice</a:t>
+            </a:r>
+            <a:endParaRPr lang="en-US" sz="2800" dirty="0"/>
+          </a:p>
+        </p:txBody>
+      </p:sp>
+      <p:sp>
+        <p:nvSpPr>
+          <p:cNvPr id="6" name="Shape 4"/>
+          <p:cNvSpPr/>
+          <p:nvPr/>
+        </p:nvSpPr>
+        <p:spPr>
+          <a:xfrm>
+            <a:off x="822960" y="1783080"/>
+            <a:ext cx="5074920" cy="2011680"/>
+          </a:xfrm>
+          <a:prstGeom prst="rect">
+            <a:avLst/>
+          </a:prstGeom>
+          <a:solidFill>
+            <a:srgbClr val="E8EFE7"/>
+          </a:solidFill>
+          <a:ln w="12700">
+            <a:solidFill>
+              <a:srgbClr val="8AA394"/>
+            </a:solidFill>
+            <a:prstDash val="solid"/>
+          </a:ln>
+        </p:spPr>
+      </p:sp>
+      <p:sp>
+        <p:nvSpPr>
+          <p:cNvPr id="7" name="Text 5"/>
+          <p:cNvSpPr/>
+          <p:nvPr/>
+        </p:nvSpPr>
+        <p:spPr>
+          <a:xfrm>
+            <a:off x="1097280" y="1965960"/>
+            <a:ext cx="4572000" cy="411480"/>
+          </a:xfrm>
+          <a:prstGeom prst="rect">
+            <a:avLst/>
+          </a:prstGeom>
+          <a:noFill/>
+          <a:ln/>
+        </p:spPr>
+        <p:txBody>
+          <a:bodyPr wrap="square" lIns="0" tIns="0" rIns="0" bIns="0" rtlCol="0" anchor="ctr"/>
+          <a:lstStyle/>
+          <a:p>
+            <a:pPr indent="0" marL="0">
+              <a:buNone/>
+            </a:pPr>
+            <a:r>
+              <a:rPr lang="en-US" sz="2100" dirty="0">
+                <a:solidFill>
+                  <a:srgbClr val="4A6B5D"/>
+                </a:solidFill>
+                <a:latin typeface="Georgia" pitchFamily="34" charset="0"/>
+                <a:ea typeface="Georgia" pitchFamily="34" charset="-122"/>
+                <a:cs typeface="Georgia" pitchFamily="34" charset="-120"/>
+              </a:rPr>
+              <a:t>Candidate A</a:t>
+            </a:r>
+            <a:endParaRPr lang="en-US" sz="2100" dirty="0"/>
+          </a:p>
+        </p:txBody>
+      </p:sp>
+      <p:sp>
+        <p:nvSpPr>
+          <p:cNvPr id="8" name="Text 6"/>
+          <p:cNvSpPr/>
+          <p:nvPr/>
+        </p:nvSpPr>
+        <p:spPr>
+          <a:xfrm>
+            <a:off x="1097280" y="2395728"/>
+            <a:ext cx="4572000" cy="365760"/>
+          </a:xfrm>
+          <a:prstGeom prst="rect">
+            <a:avLst/>
+          </a:prstGeom>
+          <a:noFill/>
+          <a:ln/>
+        </p:spPr>
+        <p:txBody>
+          <a:bodyPr wrap="square" lIns="0" tIns="0" rIns="0" bIns="0" rtlCol="0" anchor="ctr"/>
+          <a:lstStyle/>
+          <a:p>
+            <a:pPr indent="0" marL="0">
+              <a:buNone/>
+            </a:pPr>
+            <a:r>
+              <a:rPr lang="en-US" sz="1200" b="1" spc="100" kern="0" dirty="0">
+                <a:solidFill>
+                  <a:srgbClr val="7A7F72"/>
+                </a:solidFill>
+                <a:latin typeface="Arial" pitchFamily="34" charset="0"/>
+                <a:ea typeface="Arial" pitchFamily="34" charset="-122"/>
+                <a:cs typeface="Arial" pitchFamily="34" charset="-120"/>
+              </a:rPr>
+              <a:t>Level 3</a:t>
+            </a:r>
+            <a:endParaRPr lang="en-US" sz="1200" dirty="0"/>
+          </a:p>
+        </p:txBody>
+      </p:sp>
+      <p:sp>
+        <p:nvSpPr>
+          <p:cNvPr id="9" name="Text 7"/>
+          <p:cNvSpPr/>
+          <p:nvPr/>
+        </p:nvSpPr>
+        <p:spPr>
+          <a:xfrm>
+            <a:off x="1097280" y="2834640"/>
+            <a:ext cx="4572000" cy="822960"/>
+          </a:xfrm>
+          <a:prstGeom prst="rect">
+            <a:avLst/>
+          </a:prstGeom>
+          <a:noFill/>
+          <a:ln/>
+        </p:spPr>
+        <p:txBody>
+          <a:bodyPr wrap="square" lIns="0" tIns="0" rIns="0" bIns="0" rtlCol="0" anchor="t"/>
+          <a:lstStyle/>
+          <a:p>
+            <a:pPr indent="0" marL="0">
+              <a:lnSpc>
+                <a:spcPts val="2100"/>
+              </a:lnSpc>
+              <a:buNone/>
+            </a:pPr>
+            <a:r>
+              <a:rPr lang="en-US" sz="1550" i="1" dirty="0">
+                <a:solidFill>
+                  <a:srgbClr val="24313F"/>
+                </a:solidFill>
+                <a:latin typeface="Georgia" pitchFamily="34" charset="0"/>
+                <a:ea typeface="Georgia" pitchFamily="34" charset="-122"/>
+                <a:cs typeface="Georgia" pitchFamily="34" charset="-120"/>
+              </a:rPr>
+              <a:t>All four questions answered in a single digital tool</a:t>
+            </a:r>
+            <a:endParaRPr lang="en-US" sz="1550" dirty="0"/>
+          </a:p>
+        </p:txBody>
+      </p:sp>
+      <p:sp>
+        <p:nvSpPr>
+          <p:cNvPr id="10" name="Shape 8"/>
+          <p:cNvSpPr/>
+          <p:nvPr/>
+        </p:nvSpPr>
+        <p:spPr>
+          <a:xfrm>
+            <a:off x="6309360" y="1783080"/>
+            <a:ext cx="5074920" cy="2011680"/>
+          </a:xfrm>
+          <a:prstGeom prst="rect">
+            <a:avLst/>
+          </a:prstGeom>
+          <a:solidFill>
+            <a:srgbClr val="E8EFE7"/>
+          </a:solidFill>
+          <a:ln w="12700">
+            <a:solidFill>
+              <a:srgbClr val="8AA394"/>
+            </a:solidFill>
+            <a:prstDash val="solid"/>
+          </a:ln>
+        </p:spPr>
+      </p:sp>
+      <p:sp>
+        <p:nvSpPr>
+          <p:cNvPr id="11" name="Text 9"/>
+          <p:cNvSpPr/>
+          <p:nvPr/>
+        </p:nvSpPr>
+        <p:spPr>
+          <a:xfrm>
+            <a:off x="6583680" y="1965960"/>
+            <a:ext cx="4572000" cy="411480"/>
+          </a:xfrm>
+          <a:prstGeom prst="rect">
+            <a:avLst/>
+          </a:prstGeom>
+          <a:noFill/>
+          <a:ln/>
+        </p:spPr>
+        <p:txBody>
+          <a:bodyPr wrap="square" lIns="0" tIns="0" rIns="0" bIns="0" rtlCol="0" anchor="ctr"/>
+          <a:lstStyle/>
+          <a:p>
+            <a:pPr indent="0" marL="0">
+              <a:buNone/>
+            </a:pPr>
+            <a:r>
+              <a:rPr lang="en-US" sz="2100" dirty="0">
+                <a:solidFill>
+                  <a:srgbClr val="4A6B5D"/>
+                </a:solidFill>
+                <a:latin typeface="Georgia" pitchFamily="34" charset="0"/>
+                <a:ea typeface="Georgia" pitchFamily="34" charset="-122"/>
+                <a:cs typeface="Georgia" pitchFamily="34" charset="-120"/>
+              </a:rPr>
+              <a:t>Candidate B</a:t>
+            </a:r>
+            <a:endParaRPr lang="en-US" sz="2100" dirty="0"/>
+          </a:p>
+        </p:txBody>
+      </p:sp>
+      <p:sp>
+        <p:nvSpPr>
+          <p:cNvPr id="12" name="Text 10"/>
+          <p:cNvSpPr/>
+          <p:nvPr/>
+        </p:nvSpPr>
+        <p:spPr>
+          <a:xfrm>
+            <a:off x="6583680" y="2395728"/>
+            <a:ext cx="4572000" cy="365760"/>
+          </a:xfrm>
+          <a:prstGeom prst="rect">
+            <a:avLst/>
+          </a:prstGeom>
+          <a:noFill/>
+          <a:ln/>
+        </p:spPr>
+        <p:txBody>
+          <a:bodyPr wrap="square" lIns="0" tIns="0" rIns="0" bIns="0" rtlCol="0" anchor="ctr"/>
+          <a:lstStyle/>
+          <a:p>
+            <a:pPr indent="0" marL="0">
+              <a:buNone/>
+            </a:pPr>
+            <a:r>
+              <a:rPr lang="en-US" sz="1200" b="1" spc="100" kern="0" dirty="0">
+                <a:solidFill>
+                  <a:srgbClr val="7A7F72"/>
+                </a:solidFill>
+                <a:latin typeface="Arial" pitchFamily="34" charset="0"/>
+                <a:ea typeface="Arial" pitchFamily="34" charset="-122"/>
+                <a:cs typeface="Arial" pitchFamily="34" charset="-120"/>
+              </a:rPr>
+              <a:t>top of Level 5</a:t>
+            </a:r>
+            <a:endParaRPr lang="en-US" sz="1200" dirty="0"/>
+          </a:p>
+        </p:txBody>
+      </p:sp>
+      <p:sp>
+        <p:nvSpPr>
+          <p:cNvPr id="13" name="Text 11"/>
+          <p:cNvSpPr/>
+          <p:nvPr/>
+        </p:nvSpPr>
+        <p:spPr>
+          <a:xfrm>
+            <a:off x="6583680" y="2834640"/>
+            <a:ext cx="4572000" cy="822960"/>
+          </a:xfrm>
+          <a:prstGeom prst="rect">
+            <a:avLst/>
+          </a:prstGeom>
+          <a:noFill/>
+          <a:ln/>
+        </p:spPr>
+        <p:txBody>
+          <a:bodyPr wrap="square" lIns="0" tIns="0" rIns="0" bIns="0" rtlCol="0" anchor="t"/>
+          <a:lstStyle/>
+          <a:p>
+            <a:pPr indent="0" marL="0">
+              <a:lnSpc>
+                <a:spcPts val="2100"/>
+              </a:lnSpc>
+              <a:buNone/>
+            </a:pPr>
+            <a:r>
+              <a:rPr lang="en-US" sz="1550" i="1" dirty="0">
+                <a:solidFill>
+                  <a:srgbClr val="24313F"/>
+                </a:solidFill>
+                <a:latin typeface="Georgia" pitchFamily="34" charset="0"/>
+                <a:ea typeface="Georgia" pitchFamily="34" charset="-122"/>
+                <a:cs typeface="Georgia" pitchFamily="34" charset="-120"/>
+              </a:rPr>
+              <a:t>All four questions answered in a single digital tool</a:t>
+            </a:r>
+            <a:endParaRPr lang="en-US" sz="1550" dirty="0"/>
+          </a:p>
+        </p:txBody>
+      </p:sp>
+      <p:sp>
+        <p:nvSpPr>
+          <p:cNvPr id="14" name="Shape 12"/>
+          <p:cNvSpPr/>
+          <p:nvPr/>
+        </p:nvSpPr>
+        <p:spPr>
+          <a:xfrm>
+            <a:off x="822960" y="4114800"/>
+            <a:ext cx="914400" cy="0"/>
+          </a:xfrm>
+          <a:prstGeom prst="line">
+            <a:avLst/>
+          </a:prstGeom>
+          <a:noFill/>
+          <a:ln w="31750">
+            <a:solidFill>
+              <a:srgbClr val="8C3A38"/>
+            </a:solidFill>
+            <a:prstDash val="solid"/>
+          </a:ln>
+        </p:spPr>
+      </p:sp>
+      <p:sp>
+        <p:nvSpPr>
+          <p:cNvPr id="15" name="Text 13"/>
+          <p:cNvSpPr/>
+          <p:nvPr/>
+        </p:nvSpPr>
+        <p:spPr>
+          <a:xfrm>
+            <a:off x="822960" y="4297680"/>
+            <a:ext cx="10543032" cy="1371600"/>
+          </a:xfrm>
+          <a:prstGeom prst="rect">
+            <a:avLst/>
+          </a:prstGeom>
+          <a:noFill/>
+          <a:ln/>
+        </p:spPr>
+        <p:txBody>
+          <a:bodyPr wrap="square" lIns="0" tIns="0" rIns="0" bIns="0" rtlCol="0" anchor="t"/>
+          <a:lstStyle/>
+          <a:p>
+            <a:pPr indent="0" marL="0">
+              <a:lnSpc>
+                <a:spcPts val="2300"/>
+              </a:lnSpc>
+              <a:buNone/>
+            </a:pPr>
+            <a:r>
+              <a:rPr lang="en-US" sz="1650" dirty="0">
+                <a:solidFill>
+                  <a:srgbClr val="24313F"/>
+                </a:solidFill>
+                <a:latin typeface="Georgia" pitchFamily="34" charset="0"/>
+                <a:ea typeface="Georgia" pitchFamily="34" charset="-122"/>
+                <a:cs typeface="Georgia" pitchFamily="34" charset="-120"/>
+              </a:rPr>
+              <a:t>Even the near-perfect portfolio lost its CCR strand to the same defect as the weak one: everything in one tool. Presented creatively, using technology is a spread requirement, not a suggestion: the format menu (director's commentary, voiceover presentation, podcast, screencast) exists to be used across more than one application.</a:t>
+            </a:r>
+            <a:endParaRPr lang="en-US" sz="1650" dirty="0"/>
+          </a:p>
+        </p:txBody>
+      </p:sp>
+      <p:sp>
+        <p:nvSpPr>
+          <p:cNvPr id="16" name="Shape 14"/>
+          <p:cNvSpPr/>
+          <p:nvPr/>
+        </p:nvSpPr>
+        <p:spPr>
+          <a:xfrm>
+            <a:off x="822960" y="6382512"/>
+            <a:ext cx="10543032" cy="0"/>
+          </a:xfrm>
+          <a:prstGeom prst="line">
+            <a:avLst/>
+          </a:prstGeom>
+          <a:noFill/>
+          <a:ln w="9525">
+            <a:solidFill>
+              <a:srgbClr val="D9D4C4"/>
+            </a:solidFill>
+            <a:prstDash val="solid"/>
+          </a:ln>
+        </p:spPr>
+      </p:sp>
+      <p:sp>
+        <p:nvSpPr>
+          <p:cNvPr id="17" name="Text 15"/>
+          <p:cNvSpPr/>
+          <p:nvPr/>
+        </p:nvSpPr>
+        <p:spPr>
+          <a:xfrm>
+            <a:off x="822960" y="6419088"/>
+            <a:ext cx="7315200" cy="274320"/>
+          </a:xfrm>
+          <a:prstGeom prst="rect">
+            <a:avLst/>
+          </a:prstGeom>
+          <a:noFill/>
+          <a:ln/>
+        </p:spPr>
+        <p:txBody>
+          <a:bodyPr wrap="square" lIns="0" tIns="0" rIns="0" bIns="0" rtlCol="0" anchor="ctr"/>
+          <a:lstStyle/>
+          <a:p>
+            <a:pPr indent="0" marL="0">
+              <a:buNone/>
+            </a:pPr>
+            <a:r>
+              <a:rPr lang="en-US" sz="900" spc="150" kern="0" dirty="0">
+                <a:solidFill>
+                  <a:srgbClr val="7A7F72"/>
+                </a:solidFill>
+                <a:latin typeface="Arial" pitchFamily="34" charset="0"/>
+                <a:ea typeface="Arial" pitchFamily="34" charset="-122"/>
+                <a:cs typeface="Arial" pitchFamily="34" charset="-120"/>
+              </a:rPr>
+              <a:t>MEDIA STUDIES 9607 · SEMESTER I</a:t>
+            </a:r>
+            <a:endParaRPr lang="en-US" sz="900" dirty="0"/>
+          </a:p>
+        </p:txBody>
+      </p:sp>
+      <p:sp>
+        <p:nvSpPr>
+          <p:cNvPr id="18" name="Text 16"/>
+          <p:cNvSpPr/>
+          <p:nvPr/>
+        </p:nvSpPr>
+        <p:spPr>
+          <a:xfrm>
+            <a:off x="10268712" y="6355080"/>
+            <a:ext cx="1097280" cy="365760"/>
+          </a:xfrm>
+          <a:prstGeom prst="rect">
+            <a:avLst/>
+          </a:prstGeom>
+          <a:noFill/>
+          <a:ln/>
+        </p:spPr>
+        <p:txBody>
+          <a:bodyPr wrap="square" lIns="0" tIns="0" rIns="0" bIns="0" rtlCol="0" anchor="ctr"/>
+          <a:lstStyle/>
+          <a:p>
+            <a:pPr algn="r" indent="0" marL="0">
+              <a:buNone/>
+            </a:pPr>
+            <a:r>
+              <a:rPr lang="en-US" sz="1600" dirty="0">
+                <a:solidFill>
+                  <a:srgbClr val="A3C1AD"/>
+                </a:solidFill>
+                <a:latin typeface="Georgia" pitchFamily="34" charset="0"/>
+                <a:ea typeface="Georgia" pitchFamily="34" charset="-122"/>
+                <a:cs typeface="Georgia" pitchFamily="34" charset="-120"/>
+              </a:rPr>
+              <a:t>06</a:t>
+            </a:r>
+            <a:endParaRPr lang="en-US" sz="1600" dirty="0"/>
+          </a:p>
+        </p:txBody>
+      </p:sp>
+    </p:spTree>
+  </p:cSld>
+  <p:clrMapOvr>
+    <a:masterClrMapping/>
+  </p:clrMapOvr>
+</p:sld>
+</file>
+
+<file path=ppt/slides/slide12.xml><?xml version="1.0" encoding="utf-8"?>
+<p:sld xmlns:a="http://schemas.openxmlformats.org/drawingml/2006/main" xmlns:r="http://schemas.openxmlformats.org/officeDocument/2006/relationships" xmlns:p="http://schemas.openxmlformats.org/presentationml/2006/main">
+  <p:cSld name="Slide 12">
+    <p:bg>
+      <p:bgPr>
+        <a:solidFill>
+          <a:srgbClr val="FAF8F1"/>
+        </a:solidFill>
+      </p:bgPr>
+    </p:bg>
+    <p:spTree>
+      <p:nvGrpSpPr>
+        <p:cNvPr id="1" name=""/>
+        <p:cNvGrpSpPr/>
+        <p:nvPr/>
+      </p:nvGrpSpPr>
+      <p:grpSpPr>
+        <a:xfrm>
+          <a:off x="0" y="0"/>
+          <a:ext cx="0" cy="0"/>
+          <a:chOff x="0" y="0"/>
+          <a:chExt cx="0" cy="0"/>
+        </a:xfrm>
+      </p:grpSpPr>
+      <p:sp>
+        <p:nvSpPr>
+          <p:cNvPr id="2" name="Text 0"/>
+          <p:cNvSpPr/>
+          <p:nvPr/>
+        </p:nvSpPr>
+        <p:spPr>
+          <a:xfrm>
+            <a:off x="822960" y="457200"/>
+            <a:ext cx="6400800" cy="274320"/>
+          </a:xfrm>
+          <a:prstGeom prst="rect">
+            <a:avLst/>
+          </a:prstGeom>
+          <a:noFill/>
+          <a:ln/>
+        </p:spPr>
+        <p:txBody>
+          <a:bodyPr wrap="square" lIns="0" tIns="0" rIns="0" bIns="0" rtlCol="0" anchor="ctr"/>
+          <a:lstStyle/>
+          <a:p>
+            <a:pPr algn="l" indent="0" marL="0">
+              <a:buNone/>
+            </a:pPr>
+            <a:r>
+              <a:rPr lang="en-US" sz="1100" b="1" spc="250" kern="0" dirty="0">
+                <a:solidFill>
+                  <a:srgbClr val="4A6B5D"/>
+                </a:solidFill>
+                <a:latin typeface="Arial" pitchFamily="34" charset="0"/>
+                <a:ea typeface="Arial" pitchFamily="34" charset="-122"/>
+                <a:cs typeface="Arial" pitchFamily="34" charset="-120"/>
+              </a:rPr>
+              <a:t>DELIVERABLE · CS11</a:t>
+            </a:r>
+            <a:endParaRPr lang="en-US" sz="1100" dirty="0"/>
+          </a:p>
+        </p:txBody>
+      </p:sp>
+      <p:sp>
+        <p:nvSpPr>
+          <p:cNvPr id="3" name="Text 1"/>
+          <p:cNvSpPr/>
+          <p:nvPr/>
+        </p:nvSpPr>
+        <p:spPr>
+          <a:xfrm>
+            <a:off x="6793992" y="457200"/>
+            <a:ext cx="4572000" cy="274320"/>
+          </a:xfrm>
+          <a:prstGeom prst="rect">
+            <a:avLst/>
+          </a:prstGeom>
+          <a:noFill/>
+          <a:ln/>
+        </p:spPr>
+        <p:txBody>
+          <a:bodyPr wrap="square" lIns="0" tIns="0" rIns="0" bIns="0" rtlCol="0" anchor="ctr"/>
+          <a:lstStyle/>
+          <a:p>
+            <a:pPr algn="r" indent="0" marL="0">
+              <a:buNone/>
+            </a:pPr>
+            <a:r>
+              <a:rPr lang="en-US" sz="1100" b="1" spc="250" kern="0" dirty="0">
+                <a:solidFill>
+                  <a:srgbClr val="7A7F72"/>
+                </a:solidFill>
+                <a:latin typeface="Arial" pitchFamily="34" charset="0"/>
+                <a:ea typeface="Arial" pitchFamily="34" charset="-122"/>
+                <a:cs typeface="Arial" pitchFamily="34" charset="-120"/>
+              </a:rPr>
+              <a:t>DIRECT PRACTICE FOR A3</a:t>
+            </a:r>
+            <a:endParaRPr lang="en-US" sz="1100" dirty="0"/>
+          </a:p>
+        </p:txBody>
+      </p:sp>
+      <p:sp>
+        <p:nvSpPr>
+          <p:cNvPr id="4" name="Shape 2"/>
+          <p:cNvSpPr/>
+          <p:nvPr/>
+        </p:nvSpPr>
+        <p:spPr>
+          <a:xfrm>
+            <a:off x="822960" y="786384"/>
+            <a:ext cx="10543032" cy="0"/>
+          </a:xfrm>
+          <a:prstGeom prst="line">
+            <a:avLst/>
+          </a:prstGeom>
+          <a:noFill/>
+          <a:ln w="9525">
+            <a:solidFill>
+              <a:srgbClr val="D9D4C4"/>
+            </a:solidFill>
+            <a:prstDash val="solid"/>
+          </a:ln>
+        </p:spPr>
+      </p:sp>
+      <p:sp>
+        <p:nvSpPr>
+          <p:cNvPr id="5" name="Text 3"/>
+          <p:cNvSpPr/>
+          <p:nvPr/>
+        </p:nvSpPr>
+        <p:spPr>
+          <a:xfrm>
+            <a:off x="822960" y="1005840"/>
+            <a:ext cx="6309360" cy="822960"/>
+          </a:xfrm>
+          <a:prstGeom prst="rect">
+            <a:avLst/>
+          </a:prstGeom>
+          <a:noFill/>
+          <a:ln/>
+        </p:spPr>
+        <p:txBody>
+          <a:bodyPr wrap="square" lIns="0" tIns="0" rIns="0" bIns="0" rtlCol="0" anchor="ctr"/>
+          <a:lstStyle/>
+          <a:p>
+            <a:pPr indent="0" marL="0">
+              <a:buNone/>
+            </a:pPr>
+            <a:r>
+              <a:rPr lang="en-US" sz="2800" dirty="0">
+                <a:solidFill>
+                  <a:srgbClr val="24313F"/>
+                </a:solidFill>
+                <a:latin typeface="Georgia" pitchFamily="34" charset="0"/>
+                <a:ea typeface="Georgia" pitchFamily="34" charset="-122"/>
+                <a:cs typeface="Georgia" pitchFamily="34" charset="-120"/>
+              </a:rPr>
+              <a:t>Reviewed against the real C1 criteria</a:t>
+            </a:r>
+            <a:endParaRPr lang="en-US" sz="2800" dirty="0"/>
+          </a:p>
+        </p:txBody>
+      </p:sp>
+      <p:sp>
+        <p:nvSpPr>
+          <p:cNvPr id="6" name="Shape 4"/>
+          <p:cNvSpPr/>
+          <p:nvPr/>
+        </p:nvSpPr>
+        <p:spPr>
+          <a:xfrm>
+            <a:off x="822960" y="1965960"/>
+            <a:ext cx="914400" cy="0"/>
+          </a:xfrm>
+          <a:prstGeom prst="line">
+            <a:avLst/>
+          </a:prstGeom>
+          <a:noFill/>
+          <a:ln w="31750">
+            <a:solidFill>
+              <a:srgbClr val="8C3A38"/>
+            </a:solidFill>
+            <a:prstDash val="solid"/>
+          </a:ln>
+        </p:spPr>
+      </p:sp>
+      <p:sp>
+        <p:nvSpPr>
+          <p:cNvPr id="7" name="Text 5"/>
+          <p:cNvSpPr/>
+          <p:nvPr/>
+        </p:nvSpPr>
+        <p:spPr>
+          <a:xfrm>
+            <a:off x="822960" y="2194560"/>
+            <a:ext cx="6309360" cy="2377440"/>
+          </a:xfrm>
+          <a:prstGeom prst="rect">
+            <a:avLst/>
+          </a:prstGeom>
+          <a:noFill/>
+          <a:ln/>
+        </p:spPr>
+        <p:txBody>
+          <a:bodyPr wrap="square" lIns="0" tIns="0" rIns="0" bIns="0" rtlCol="0" anchor="t"/>
+          <a:lstStyle/>
+          <a:p>
+            <a:pPr indent="0" marL="0">
+              <a:lnSpc>
+                <a:spcPts val="2300"/>
+              </a:lnSpc>
+              <a:buNone/>
+            </a:pPr>
+            <a:r>
+              <a:rPr lang="en-US" sz="1600" dirty="0">
+                <a:solidFill>
+                  <a:srgbClr val="24313F"/>
+                </a:solidFill>
+                <a:latin typeface="Georgia" pitchFamily="34" charset="0"/>
+                <a:ea typeface="Georgia" pitchFamily="34" charset="-122"/>
+                <a:cs typeface="Georgia" pitchFamily="34" charset="-120"/>
+              </a:rPr>
+              <a:t>Full drafts reviewed by teacher and peers in the C1 criteria's own language: describe, question, suggest. Every draft leaves with a written action list. The format is chosen by Friday from the coursebook menu, and presented creatively using technology is a requirement, not a suggestion.</a:t>
+            </a:r>
+            <a:endParaRPr lang="en-US" sz="1600" dirty="0"/>
+          </a:p>
+        </p:txBody>
+      </p:sp>
+      <p:sp>
+        <p:nvSpPr>
+          <p:cNvPr id="8" name="Text 6"/>
+          <p:cNvSpPr/>
+          <p:nvPr/>
+        </p:nvSpPr>
+        <p:spPr>
+          <a:xfrm>
+            <a:off x="822960" y="4754880"/>
+            <a:ext cx="6309360" cy="640080"/>
+          </a:xfrm>
+          <a:prstGeom prst="rect">
+            <a:avLst/>
+          </a:prstGeom>
+          <a:noFill/>
+          <a:ln/>
+        </p:spPr>
+        <p:txBody>
+          <a:bodyPr wrap="square" lIns="0" tIns="0" rIns="0" bIns="0" rtlCol="0" anchor="t"/>
+          <a:lstStyle/>
+          <a:p>
+            <a:pPr indent="0" marL="0">
+              <a:lnSpc>
+                <a:spcPts val="1600"/>
+              </a:lnSpc>
+              <a:buNone/>
+            </a:pPr>
+            <a:r>
+              <a:rPr lang="en-US" sz="1200" i="1" dirty="0">
+                <a:solidFill>
+                  <a:srgbClr val="7A7F72"/>
+                </a:solidFill>
+                <a:latin typeface="Arial" pitchFamily="34" charset="0"/>
+                <a:ea typeface="Arial" pitchFamily="34" charset="-122"/>
+                <a:cs typeface="Arial" pitchFamily="34" charset="-120"/>
+              </a:rPr>
+              <a:t>This cohort's CCR is the blog-era, four-question, creative-format artifact, coursebook 6.7.</a:t>
+            </a:r>
+            <a:endParaRPr lang="en-US" sz="1200" dirty="0"/>
+          </a:p>
+        </p:txBody>
+      </p:sp>
+      <p:sp>
+        <p:nvSpPr>
+          <p:cNvPr id="9" name="Shape 7"/>
+          <p:cNvSpPr/>
+          <p:nvPr/>
+        </p:nvSpPr>
+        <p:spPr>
+          <a:xfrm>
+            <a:off x="7452360" y="1097280"/>
+            <a:ext cx="3931920" cy="4572000"/>
+          </a:xfrm>
+          <a:prstGeom prst="rect">
+            <a:avLst/>
+          </a:prstGeom>
+          <a:solidFill>
+            <a:srgbClr val="FAF8F1"/>
+          </a:solidFill>
+          <a:ln w="9525">
+            <a:solidFill>
+              <a:srgbClr val="D9D4C4"/>
+            </a:solidFill>
+            <a:prstDash val="solid"/>
+          </a:ln>
+        </p:spPr>
+      </p:sp>
+      <p:pic>
+        <p:nvPicPr>
+          <p:cNvPr id="10" name="Image 0" descr="/Users/dogan/Documents/Vaults/Courses/wiki/classes/media-studies/decks/_build/img/syl-c1-criteria-b.jpg">    </p:cNvPr>
+          <p:cNvPicPr>
+            <a:picLocks noChangeAspect="1"/>
+          </p:cNvPicPr>
+          <p:nvPr/>
+        </p:nvPicPr>
+        <p:blipFill>
+          <a:blip r:embed="rId1"/>
+          <a:stretch>
+            <a:fillRect/>
+          </a:stretch>
+        </p:blipFill>
+        <p:spPr>
+          <a:xfrm>
+            <a:off x="7580376" y="2083597"/>
+            <a:ext cx="3675888" cy="2599367"/>
+          </a:xfrm>
+          <a:prstGeom prst="rect">
+            <a:avLst/>
+          </a:prstGeom>
+        </p:spPr>
+      </p:pic>
+      <p:sp>
+        <p:nvSpPr>
+          <p:cNvPr id="11" name="Text 8"/>
+          <p:cNvSpPr/>
+          <p:nvPr/>
+        </p:nvSpPr>
+        <p:spPr>
+          <a:xfrm>
+            <a:off x="7452360" y="5687568"/>
+            <a:ext cx="3931920" cy="274320"/>
+          </a:xfrm>
+          <a:prstGeom prst="rect">
+            <a:avLst/>
+          </a:prstGeom>
+          <a:noFill/>
+          <a:ln/>
+        </p:spPr>
+        <p:txBody>
+          <a:bodyPr wrap="square" lIns="0" tIns="0" rIns="0" bIns="0" rtlCol="0" anchor="ctr"/>
+          <a:lstStyle/>
+          <a:p>
+            <a:pPr algn="ctr" indent="0" marL="0">
+              <a:buNone/>
+            </a:pPr>
+            <a:r>
+              <a:rPr lang="en-US" sz="1000" dirty="0">
+                <a:solidFill>
+                  <a:srgbClr val="7A7F72"/>
+                </a:solidFill>
+                <a:latin typeface="Arial" pitchFamily="34" charset="0"/>
+                <a:ea typeface="Arial" pitchFamily="34" charset="-122"/>
+                <a:cs typeface="Arial" pitchFamily="34" charset="-120"/>
+              </a:rPr>
+              <a:t>The 2027 syllabus's own C1 assessment criteria</a:t>
+            </a:r>
+            <a:endParaRPr lang="en-US" sz="1000" dirty="0"/>
+          </a:p>
+        </p:txBody>
+      </p:sp>
+      <p:sp>
+        <p:nvSpPr>
+          <p:cNvPr id="12" name="Shape 9"/>
+          <p:cNvSpPr/>
+          <p:nvPr/>
+        </p:nvSpPr>
+        <p:spPr>
+          <a:xfrm>
+            <a:off x="822960" y="6382512"/>
+            <a:ext cx="10543032" cy="0"/>
+          </a:xfrm>
+          <a:prstGeom prst="line">
+            <a:avLst/>
+          </a:prstGeom>
+          <a:noFill/>
+          <a:ln w="9525">
+            <a:solidFill>
+              <a:srgbClr val="D9D4C4"/>
+            </a:solidFill>
+            <a:prstDash val="solid"/>
+          </a:ln>
+        </p:spPr>
+      </p:sp>
+      <p:sp>
+        <p:nvSpPr>
+          <p:cNvPr id="13" name="Text 10"/>
+          <p:cNvSpPr/>
+          <p:nvPr/>
+        </p:nvSpPr>
+        <p:spPr>
+          <a:xfrm>
+            <a:off x="822960" y="6419088"/>
+            <a:ext cx="7315200" cy="274320"/>
+          </a:xfrm>
+          <a:prstGeom prst="rect">
+            <a:avLst/>
+          </a:prstGeom>
+          <a:noFill/>
+          <a:ln/>
+        </p:spPr>
+        <p:txBody>
+          <a:bodyPr wrap="square" lIns="0" tIns="0" rIns="0" bIns="0" rtlCol="0" anchor="ctr"/>
+          <a:lstStyle/>
+          <a:p>
+            <a:pPr indent="0" marL="0">
+              <a:buNone/>
+            </a:pPr>
+            <a:r>
+              <a:rPr lang="en-US" sz="900" spc="150" kern="0" dirty="0">
+                <a:solidFill>
+                  <a:srgbClr val="7A7F72"/>
+                </a:solidFill>
+                <a:latin typeface="Arial" pitchFamily="34" charset="0"/>
+                <a:ea typeface="Arial" pitchFamily="34" charset="-122"/>
+                <a:cs typeface="Arial" pitchFamily="34" charset="-120"/>
+              </a:rPr>
+              <a:t>MEDIA STUDIES 9607 · SEMESTER I</a:t>
+            </a:r>
+            <a:endParaRPr lang="en-US" sz="900" dirty="0"/>
+          </a:p>
+        </p:txBody>
+      </p:sp>
+      <p:sp>
+        <p:nvSpPr>
+          <p:cNvPr id="14" name="Text 11"/>
+          <p:cNvSpPr/>
+          <p:nvPr/>
+        </p:nvSpPr>
+        <p:spPr>
+          <a:xfrm>
+            <a:off x="10268712" y="6355080"/>
+            <a:ext cx="1097280" cy="365760"/>
+          </a:xfrm>
+          <a:prstGeom prst="rect">
+            <a:avLst/>
+          </a:prstGeom>
+          <a:noFill/>
+          <a:ln/>
+        </p:spPr>
+        <p:txBody>
+          <a:bodyPr wrap="square" lIns="0" tIns="0" rIns="0" bIns="0" rtlCol="0" anchor="ctr"/>
+          <a:lstStyle/>
+          <a:p>
+            <a:pPr algn="r" indent="0" marL="0">
+              <a:buNone/>
+            </a:pPr>
+            <a:r>
+              <a:rPr lang="en-US" sz="1600" dirty="0">
+                <a:solidFill>
+                  <a:srgbClr val="A3C1AD"/>
+                </a:solidFill>
+                <a:latin typeface="Georgia" pitchFamily="34" charset="0"/>
+                <a:ea typeface="Georgia" pitchFamily="34" charset="-122"/>
+                <a:cs typeface="Georgia" pitchFamily="34" charset="-120"/>
+              </a:rPr>
+              <a:t>07</a:t>
+            </a:r>
+            <a:endParaRPr lang="en-US" sz="1600" dirty="0"/>
+          </a:p>
+        </p:txBody>
+      </p:sp>
+    </p:spTree>
+  </p:cSld>
+  <p:clrMapOvr>
+    <a:masterClrMapping/>
+  </p:clrMapOvr>
+</p:sld>
+</file>
+
+<file path=ppt/slides/slide13.xml><?xml version="1.0" encoding="utf-8"?>
+<p:sld xmlns:a="http://schemas.openxmlformats.org/drawingml/2006/main" xmlns:r="http://schemas.openxmlformats.org/officeDocument/2006/relationships" xmlns:p="http://schemas.openxmlformats.org/presentationml/2006/main">
+  <p:cSld name="Slide 13">
     <p:bg>
       <p:bgPr>
         <a:solidFill>
@@ -2513,7 +4012,7 @@
                 <a:ea typeface="Georgia" pitchFamily="34" charset="-122"/>
                 <a:cs typeface="Georgia" pitchFamily="34" charset="-120"/>
               </a:rPr>
-              <a:t>Audiences, and the</a:t>
+              <a:t>Audiences and the</a:t>
             </a:r>
             <a:endParaRPr lang="en-US" sz="4800" dirty="0"/>
           </a:p>
@@ -2673,7 +4172,7 @@
                 <a:ea typeface="Georgia" pitchFamily="34" charset="-122"/>
                 <a:cs typeface="Georgia" pitchFamily="34" charset="-120"/>
               </a:rPr>
-              <a:t>06</a:t>
+              <a:t>08</a:t>
             </a:r>
             <a:endParaRPr lang="en-US" sz="1600" dirty="0"/>
           </a:p>
@@ -3628,7 +5127,7 @@
                 <a:ea typeface="Arial" pitchFamily="34" charset="-122"/>
                 <a:cs typeface="Arial" pitchFamily="34" charset="-120"/>
               </a:rPr>
-              <a:t>THE ONE-LINE TEACHING OF THE WHOLE WEEK</a:t>
+              <a:t>同样的四个问题</a:t>
             </a:r>
             <a:endParaRPr lang="en-US" sz="1100" dirty="0"/>
           </a:p>
@@ -3667,7 +5166,7 @@
                 <a:ea typeface="Arial" pitchFamily="34" charset="-122"/>
                 <a:cs typeface="Arial" pitchFamily="34" charset="-120"/>
               </a:rPr>
-              <a:t>PUT IT ON THE WALL</a:t>
+              <a:t>IN STUDENT LANGUAGE, BOTH LANGUAGES</a:t>
             </a:r>
             <a:endParaRPr lang="en-US" sz="1100" dirty="0"/>
           </a:p>
@@ -3704,8 +5203,8 @@
         </p:nvSpPr>
         <p:spPr>
           <a:xfrm>
-            <a:off x="822960" y="1005840"/>
-            <a:ext cx="10543032" cy="731520"/>
+            <a:off x="822960" y="932688"/>
+            <a:ext cx="10543032" cy="594360"/>
           </a:xfrm>
           <a:prstGeom prst="rect">
             <a:avLst/>
@@ -3721,7 +5220,7 @@
               <a:buNone/>
             </a:pPr>
             <a:r>
-              <a:rPr lang="en-US" sz="3800" dirty="0">
+              <a:rPr lang="en-US" sz="2800" dirty="0">
                 <a:solidFill>
                   <a:srgbClr val="24313F"/>
                 </a:solidFill>
@@ -3729,9 +5228,9 @@
                 <a:ea typeface="Georgia" pitchFamily="34" charset="-122"/>
                 <a:cs typeface="Georgia" pitchFamily="34" charset="-120"/>
               </a:rPr>
-              <a:t>The tell</a:t>
-            </a:r>
-            <a:endParaRPr lang="en-US" sz="3800" dirty="0"/>
+              <a:t>The same four, in both languages</a:t>
+            </a:r>
+            <a:endParaRPr lang="en-US" sz="2800" dirty="0"/>
           </a:p>
         </p:txBody>
       </p:sp>
@@ -3743,8 +5242,8 @@
         </p:nvSpPr>
         <p:spPr>
           <a:xfrm>
-            <a:off x="822960" y="2011680"/>
-            <a:ext cx="4846320" cy="502920"/>
+            <a:off x="822960" y="1938528"/>
+            <a:ext cx="4997196" cy="457200"/>
           </a:xfrm>
           <a:prstGeom prst="rect">
             <a:avLst/>
@@ -3760,17 +5259,17 @@
               <a:buNone/>
             </a:pPr>
             <a:r>
-              <a:rPr lang="en-US" sz="2400" dirty="0">
-                <a:solidFill>
-                  <a:srgbClr val="7A7F72"/>
+              <a:rPr lang="en-US" sz="2100" dirty="0">
+                <a:solidFill>
+                  <a:srgbClr val="4A6B5D"/>
                 </a:solidFill>
                 <a:latin typeface="Georgia" pitchFamily="34" charset="0"/>
                 <a:ea typeface="Georgia" pitchFamily="34" charset="-122"/>
                 <a:cs typeface="Georgia" pitchFamily="34" charset="-120"/>
               </a:rPr>
-              <a:t>A description</a:t>
-            </a:r>
-            <a:endParaRPr lang="en-US" sz="2400" dirty="0"/>
+              <a:t>Q1 · 常规与再现</a:t>
+            </a:r>
+            <a:endParaRPr lang="en-US" sz="2100" dirty="0"/>
           </a:p>
         </p:txBody>
       </p:sp>
@@ -3782,8 +5281,8 @@
         </p:nvSpPr>
         <p:spPr>
           <a:xfrm>
-            <a:off x="822960" y="2560320"/>
-            <a:ext cx="4754880" cy="0"/>
+            <a:off x="822960" y="2468880"/>
+            <a:ext cx="4814316" cy="0"/>
           </a:xfrm>
           <a:prstGeom prst="line">
             <a:avLst/>
@@ -3805,8 +5304,8 @@
         </p:nvSpPr>
         <p:spPr>
           <a:xfrm>
-            <a:off x="822960" y="2697480"/>
-            <a:ext cx="4846320" cy="2194560"/>
+            <a:off x="822960" y="2578608"/>
+            <a:ext cx="4814316" cy="1097280"/>
           </a:xfrm>
           <a:prstGeom prst="rect">
             <a:avLst/>
@@ -3820,12 +5319,12 @@
           <a:p>
             <a:pPr indent="0" marL="0">
               <a:lnSpc>
-                <a:spcPts val="2400"/>
+                <a:spcPts val="2200"/>
               </a:lnSpc>
               <a:buNone/>
             </a:pPr>
             <a:r>
-              <a:rPr lang="en-US" sz="1700" dirty="0">
+              <a:rPr lang="en-US" sz="1500" dirty="0">
                 <a:solidFill>
                   <a:srgbClr val="24313F"/>
                 </a:solidFill>
@@ -3833,9 +5332,9 @@
                 <a:ea typeface="Georgia" pitchFamily="34" charset="-122"/>
                 <a:cs typeface="Georgia" pitchFamily="34" charset="-120"/>
               </a:rPr>
-              <a:t>contains a sequence of events. It says what you did: we filmed, then we edited, then we uploaded.</a:t>
-            </a:r>
-            <a:endParaRPr lang="en-US" sz="1700" dirty="0"/>
+              <a:t>你的作品如何运用或挑战媒体常规？它如何再现社会群体或议题？</a:t>
+            </a:r>
+            <a:endParaRPr lang="en-US" sz="1500" dirty="0"/>
           </a:p>
         </p:txBody>
       </p:sp>
@@ -3847,8 +5346,8 @@
         </p:nvSpPr>
         <p:spPr>
           <a:xfrm>
-            <a:off x="6309360" y="2011680"/>
-            <a:ext cx="4846320" cy="502920"/>
+            <a:off x="6368796" y="1938528"/>
+            <a:ext cx="4997196" cy="457200"/>
           </a:xfrm>
           <a:prstGeom prst="rect">
             <a:avLst/>
@@ -3864,7 +5363,7 @@
               <a:buNone/>
             </a:pPr>
             <a:r>
-              <a:rPr lang="en-US" sz="2400" dirty="0">
+              <a:rPr lang="en-US" sz="2100" dirty="0">
                 <a:solidFill>
                   <a:srgbClr val="4A6B5D"/>
                 </a:solidFill>
@@ -3872,9 +5371,9 @@
                 <a:ea typeface="Georgia" pitchFamily="34" charset="-122"/>
                 <a:cs typeface="Georgia" pitchFamily="34" charset="-120"/>
               </a:rPr>
-              <a:t>A reflection</a:t>
-            </a:r>
-            <a:endParaRPr lang="en-US" sz="2400" dirty="0"/>
+              <a:t>Q2 · 受众与传播</a:t>
+            </a:r>
+            <a:endParaRPr lang="en-US" sz="2100" dirty="0"/>
           </a:p>
         </p:txBody>
       </p:sp>
@@ -3886,8 +5385,8 @@
         </p:nvSpPr>
         <p:spPr>
           <a:xfrm>
-            <a:off x="6309360" y="2560320"/>
-            <a:ext cx="4754880" cy="0"/>
+            <a:off x="6368796" y="2468880"/>
+            <a:ext cx="4814316" cy="0"/>
           </a:xfrm>
           <a:prstGeom prst="line">
             <a:avLst/>
@@ -3909,8 +5408,8 @@
         </p:nvSpPr>
         <p:spPr>
           <a:xfrm>
-            <a:off x="6309360" y="2697480"/>
-            <a:ext cx="4846320" cy="2194560"/>
+            <a:off x="6368796" y="2578608"/>
+            <a:ext cx="4814316" cy="1097280"/>
           </a:xfrm>
           <a:prstGeom prst="rect">
             <a:avLst/>
@@ -3924,12 +5423,12 @@
           <a:p>
             <a:pPr indent="0" marL="0">
               <a:lnSpc>
-                <a:spcPts val="2400"/>
+                <a:spcPts val="2200"/>
               </a:lnSpc>
               <a:buNone/>
             </a:pPr>
             <a:r>
-              <a:rPr lang="en-US" sz="1700" dirty="0">
+              <a:rPr lang="en-US" sz="1500" dirty="0">
                 <a:solidFill>
                   <a:srgbClr val="24313F"/>
                 </a:solidFill>
@@ -3937,22 +5436,61 @@
                 <a:ea typeface="Georgia" pitchFamily="34" charset="-122"/>
                 <a:cs typeface="Georgia" pitchFamily="34" charset="-120"/>
               </a:rPr>
-              <a:t>contains a decision, a reason, or a change. It says why, and what you would do differently.</a:t>
-            </a:r>
-            <a:endParaRPr lang="en-US" sz="1700" dirty="0"/>
-          </a:p>
-        </p:txBody>
-      </p:sp>
-      <p:sp>
-        <p:nvSpPr>
-          <p:cNvPr id="12" name="Shape 10"/>
-          <p:cNvSpPr/>
-          <p:nvPr/>
-        </p:nvSpPr>
-        <p:spPr>
-          <a:xfrm>
-            <a:off x="822960" y="6382512"/>
-            <a:ext cx="10543032" cy="0"/>
+              <a:t>你的作品吸引谁？它会怎样真实地到达并流通给这些受众？</a:t>
+            </a:r>
+            <a:endParaRPr lang="en-US" sz="1500" dirty="0"/>
+          </a:p>
+        </p:txBody>
+      </p:sp>
+      <p:sp>
+        <p:nvSpPr>
+          <p:cNvPr id="12" name="Text 10"/>
+          <p:cNvSpPr/>
+          <p:nvPr/>
+        </p:nvSpPr>
+        <p:spPr>
+          <a:xfrm>
+            <a:off x="822960" y="4133088"/>
+            <a:ext cx="4997196" cy="457200"/>
+          </a:xfrm>
+          <a:prstGeom prst="rect">
+            <a:avLst/>
+          </a:prstGeom>
+          <a:noFill/>
+          <a:ln/>
+        </p:spPr>
+        <p:txBody>
+          <a:bodyPr wrap="square" lIns="0" tIns="0" rIns="0" bIns="0" rtlCol="0" anchor="ctr"/>
+          <a:lstStyle/>
+          <a:p>
+            <a:pPr indent="0" marL="0">
+              <a:buNone/>
+            </a:pPr>
+            <a:r>
+              <a:rPr lang="en-US" sz="2100" dirty="0">
+                <a:solidFill>
+                  <a:srgbClr val="4A6B5D"/>
+                </a:solidFill>
+                <a:latin typeface="Georgia" pitchFamily="34" charset="0"/>
+                <a:ea typeface="Georgia" pitchFamily="34" charset="-122"/>
+                <a:cs typeface="Georgia" pitchFamily="34" charset="-120"/>
+              </a:rPr>
+              <a:t>Q3 · 技能成长</a:t>
+            </a:r>
+            <a:endParaRPr lang="en-US" sz="2100" dirty="0"/>
+          </a:p>
+        </p:txBody>
+      </p:sp>
+      <p:sp>
+        <p:nvSpPr>
+          <p:cNvPr id="13" name="Shape 11"/>
+          <p:cNvSpPr/>
+          <p:nvPr/>
+        </p:nvSpPr>
+        <p:spPr>
+          <a:xfrm>
+            <a:off x="822960" y="4663440"/>
+            <a:ext cx="4814316" cy="0"/>
           </a:xfrm>
           <a:prstGeom prst="line">
             <a:avLst/>
@@ -3968,7 +5506,176 @@
       </p:sp>
       <p:sp>
         <p:nvSpPr>
-          <p:cNvPr id="13" name="Text 11"/>
+          <p:cNvPr id="14" name="Text 12"/>
+          <p:cNvSpPr/>
+          <p:nvPr/>
+        </p:nvSpPr>
+        <p:spPr>
+          <a:xfrm>
+            <a:off x="822960" y="4773168"/>
+            <a:ext cx="4814316" cy="1097280"/>
+          </a:xfrm>
+          <a:prstGeom prst="rect">
+            <a:avLst/>
+          </a:prstGeom>
+          <a:noFill/>
+          <a:ln/>
+        </p:spPr>
+        <p:txBody>
+          <a:bodyPr wrap="square" lIns="0" tIns="0" rIns="0" bIns="0" rtlCol="0" anchor="t"/>
+          <a:lstStyle/>
+          <a:p>
+            <a:pPr indent="0" marL="0">
+              <a:lnSpc>
+                <a:spcPts val="2200"/>
+              </a:lnSpc>
+              <a:buNone/>
+            </a:pPr>
+            <a:r>
+              <a:rPr lang="en-US" sz="1500" dirty="0">
+                <a:solidFill>
+                  <a:srgbClr val="24313F"/>
+                </a:solidFill>
+                <a:latin typeface="Georgia" pitchFamily="34" charset="0"/>
+                <a:ea typeface="Georgia" pitchFamily="34" charset="-122"/>
+                <a:cs typeface="Georgia" pitchFamily="34" charset="-120"/>
+              </a:rPr>
+              <a:t>从第一天的素材到粗剪，你的制作技能如何发展？是什么改变了它？</a:t>
+            </a:r>
+            <a:endParaRPr lang="en-US" sz="1500" dirty="0"/>
+          </a:p>
+        </p:txBody>
+      </p:sp>
+      <p:sp>
+        <p:nvSpPr>
+          <p:cNvPr id="15" name="Text 13"/>
+          <p:cNvSpPr/>
+          <p:nvPr/>
+        </p:nvSpPr>
+        <p:spPr>
+          <a:xfrm>
+            <a:off x="6368796" y="4133088"/>
+            <a:ext cx="4997196" cy="457200"/>
+          </a:xfrm>
+          <a:prstGeom prst="rect">
+            <a:avLst/>
+          </a:prstGeom>
+          <a:noFill/>
+          <a:ln/>
+        </p:spPr>
+        <p:txBody>
+          <a:bodyPr wrap="square" lIns="0" tIns="0" rIns="0" bIns="0" rtlCol="0" anchor="ctr"/>
+          <a:lstStyle/>
+          <a:p>
+            <a:pPr indent="0" marL="0">
+              <a:buNone/>
+            </a:pPr>
+            <a:r>
+              <a:rPr lang="en-US" sz="2100" dirty="0">
+                <a:solidFill>
+                  <a:srgbClr val="4A6B5D"/>
+                </a:solidFill>
+                <a:latin typeface="Georgia" pitchFamily="34" charset="0"/>
+                <a:ea typeface="Georgia" pitchFamily="34" charset="-122"/>
+                <a:cs typeface="Georgia" pitchFamily="34" charset="-120"/>
+              </a:rPr>
+              <a:t>Q4 · 技术整合</a:t>
+            </a:r>
+            <a:endParaRPr lang="en-US" sz="2100" dirty="0"/>
+          </a:p>
+        </p:txBody>
+      </p:sp>
+      <p:sp>
+        <p:nvSpPr>
+          <p:cNvPr id="16" name="Shape 14"/>
+          <p:cNvSpPr/>
+          <p:nvPr/>
+        </p:nvSpPr>
+        <p:spPr>
+          <a:xfrm>
+            <a:off x="6368796" y="4663440"/>
+            <a:ext cx="4814316" cy="0"/>
+          </a:xfrm>
+          <a:prstGeom prst="line">
+            <a:avLst/>
+          </a:prstGeom>
+          <a:noFill/>
+          <a:ln w="9525">
+            <a:solidFill>
+              <a:srgbClr val="D9D4C4"/>
+            </a:solidFill>
+            <a:prstDash val="solid"/>
+          </a:ln>
+        </p:spPr>
+      </p:sp>
+      <p:sp>
+        <p:nvSpPr>
+          <p:cNvPr id="17" name="Text 15"/>
+          <p:cNvSpPr/>
+          <p:nvPr/>
+        </p:nvSpPr>
+        <p:spPr>
+          <a:xfrm>
+            <a:off x="6368796" y="4773168"/>
+            <a:ext cx="4814316" cy="1097280"/>
+          </a:xfrm>
+          <a:prstGeom prst="rect">
+            <a:avLst/>
+          </a:prstGeom>
+          <a:noFill/>
+          <a:ln/>
+        </p:spPr>
+        <p:txBody>
+          <a:bodyPr wrap="square" lIns="0" tIns="0" rIns="0" bIns="0" rtlCol="0" anchor="t"/>
+          <a:lstStyle/>
+          <a:p>
+            <a:pPr indent="0" marL="0">
+              <a:lnSpc>
+                <a:spcPts val="2200"/>
+              </a:lnSpc>
+              <a:buNone/>
+            </a:pPr>
+            <a:r>
+              <a:rPr lang="en-US" sz="1500" dirty="0">
+                <a:solidFill>
+                  <a:srgbClr val="24313F"/>
+                </a:solidFill>
+                <a:latin typeface="Georgia" pitchFamily="34" charset="0"/>
+                <a:ea typeface="Georgia" pitchFamily="34" charset="-122"/>
+                <a:cs typeface="Georgia" pitchFamily="34" charset="-120"/>
+              </a:rPr>
+              <a:t>软件、硬件、网络：作为决定来写，我们用了X是为了Y，而不是清单。</a:t>
+            </a:r>
+            <a:endParaRPr lang="en-US" sz="1500" dirty="0"/>
+          </a:p>
+        </p:txBody>
+      </p:sp>
+      <p:sp>
+        <p:nvSpPr>
+          <p:cNvPr id="18" name="Shape 16"/>
+          <p:cNvSpPr/>
+          <p:nvPr/>
+        </p:nvSpPr>
+        <p:spPr>
+          <a:xfrm>
+            <a:off x="822960" y="6382512"/>
+            <a:ext cx="10543032" cy="0"/>
+          </a:xfrm>
+          <a:prstGeom prst="line">
+            <a:avLst/>
+          </a:prstGeom>
+          <a:noFill/>
+          <a:ln w="9525">
+            <a:solidFill>
+              <a:srgbClr val="D9D4C4"/>
+            </a:solidFill>
+            <a:prstDash val="solid"/>
+          </a:ln>
+        </p:spPr>
+      </p:sp>
+      <p:sp>
+        <p:nvSpPr>
+          <p:cNvPr id="19" name="Text 17"/>
           <p:cNvSpPr/>
           <p:nvPr/>
         </p:nvSpPr>
@@ -4007,7 +5714,7 @@
       </p:sp>
       <p:sp>
         <p:nvSpPr>
-          <p:cNvPr id="14" name="Text 12"/>
+          <p:cNvPr id="20" name="Text 18"/>
           <p:cNvSpPr/>
           <p:nvPr/>
         </p:nvSpPr>
@@ -4055,6 +5762,487 @@
 <file path=ppt/slides/slide5.xml><?xml version="1.0" encoding="utf-8"?>
 <p:sld xmlns:a="http://schemas.openxmlformats.org/drawingml/2006/main" xmlns:r="http://schemas.openxmlformats.org/officeDocument/2006/relationships" xmlns:p="http://schemas.openxmlformats.org/presentationml/2006/main">
   <p:cSld name="Slide 5">
+    <p:bg>
+      <p:bgPr>
+        <a:solidFill>
+          <a:srgbClr val="FAF8F1"/>
+        </a:solidFill>
+      </p:bgPr>
+    </p:bg>
+    <p:spTree>
+      <p:nvGrpSpPr>
+        <p:cNvPr id="1" name=""/>
+        <p:cNvGrpSpPr/>
+        <p:nvPr/>
+      </p:nvGrpSpPr>
+      <p:grpSpPr>
+        <a:xfrm>
+          <a:off x="0" y="0"/>
+          <a:ext cx="0" cy="0"/>
+          <a:chOff x="0" y="0"/>
+          <a:chExt cx="0" cy="0"/>
+        </a:xfrm>
+      </p:grpSpPr>
+      <p:sp>
+        <p:nvSpPr>
+          <p:cNvPr id="2" name="Text 0"/>
+          <p:cNvSpPr/>
+          <p:nvPr/>
+        </p:nvSpPr>
+        <p:spPr>
+          <a:xfrm>
+            <a:off x="822960" y="457200"/>
+            <a:ext cx="6400800" cy="274320"/>
+          </a:xfrm>
+          <a:prstGeom prst="rect">
+            <a:avLst/>
+          </a:prstGeom>
+          <a:noFill/>
+          <a:ln/>
+        </p:spPr>
+        <p:txBody>
+          <a:bodyPr wrap="square" lIns="0" tIns="0" rIns="0" bIns="0" rtlCol="0" anchor="ctr"/>
+          <a:lstStyle/>
+          <a:p>
+            <a:pPr algn="l" indent="0" marL="0">
+              <a:buNone/>
+            </a:pPr>
+            <a:r>
+              <a:rPr lang="en-US" sz="1100" b="1" spc="250" kern="0" dirty="0">
+                <a:solidFill>
+                  <a:srgbClr val="4A6B5D"/>
+                </a:solidFill>
+                <a:latin typeface="Arial" pitchFamily="34" charset="0"/>
+                <a:ea typeface="Arial" pitchFamily="34" charset="-122"/>
+                <a:cs typeface="Arial" pitchFamily="34" charset="-120"/>
+              </a:rPr>
+              <a:t>THE ONE-LINE TEACHING OF THE WHOLE WEEK</a:t>
+            </a:r>
+            <a:endParaRPr lang="en-US" sz="1100" dirty="0"/>
+          </a:p>
+        </p:txBody>
+      </p:sp>
+      <p:sp>
+        <p:nvSpPr>
+          <p:cNvPr id="3" name="Text 1"/>
+          <p:cNvSpPr/>
+          <p:nvPr/>
+        </p:nvSpPr>
+        <p:spPr>
+          <a:xfrm>
+            <a:off x="6793992" y="457200"/>
+            <a:ext cx="4572000" cy="274320"/>
+          </a:xfrm>
+          <a:prstGeom prst="rect">
+            <a:avLst/>
+          </a:prstGeom>
+          <a:noFill/>
+          <a:ln/>
+        </p:spPr>
+        <p:txBody>
+          <a:bodyPr wrap="square" lIns="0" tIns="0" rIns="0" bIns="0" rtlCol="0" anchor="ctr"/>
+          <a:lstStyle/>
+          <a:p>
+            <a:pPr algn="r" indent="0" marL="0">
+              <a:buNone/>
+            </a:pPr>
+            <a:r>
+              <a:rPr lang="en-US" sz="1100" b="1" spc="250" kern="0" dirty="0">
+                <a:solidFill>
+                  <a:srgbClr val="7A7F72"/>
+                </a:solidFill>
+                <a:latin typeface="Arial" pitchFamily="34" charset="0"/>
+                <a:ea typeface="Arial" pitchFamily="34" charset="-122"/>
+                <a:cs typeface="Arial" pitchFamily="34" charset="-120"/>
+              </a:rPr>
+              <a:t>PUT IT ON THE WALL</a:t>
+            </a:r>
+            <a:endParaRPr lang="en-US" sz="1100" dirty="0"/>
+          </a:p>
+        </p:txBody>
+      </p:sp>
+      <p:sp>
+        <p:nvSpPr>
+          <p:cNvPr id="4" name="Shape 2"/>
+          <p:cNvSpPr/>
+          <p:nvPr/>
+        </p:nvSpPr>
+        <p:spPr>
+          <a:xfrm>
+            <a:off x="822960" y="786384"/>
+            <a:ext cx="10543032" cy="0"/>
+          </a:xfrm>
+          <a:prstGeom prst="line">
+            <a:avLst/>
+          </a:prstGeom>
+          <a:noFill/>
+          <a:ln w="9525">
+            <a:solidFill>
+              <a:srgbClr val="D9D4C4"/>
+            </a:solidFill>
+            <a:prstDash val="solid"/>
+          </a:ln>
+        </p:spPr>
+      </p:sp>
+      <p:sp>
+        <p:nvSpPr>
+          <p:cNvPr id="5" name="Text 3"/>
+          <p:cNvSpPr/>
+          <p:nvPr/>
+        </p:nvSpPr>
+        <p:spPr>
+          <a:xfrm>
+            <a:off x="822960" y="1005840"/>
+            <a:ext cx="10543032" cy="731520"/>
+          </a:xfrm>
+          <a:prstGeom prst="rect">
+            <a:avLst/>
+          </a:prstGeom>
+          <a:noFill/>
+          <a:ln/>
+        </p:spPr>
+        <p:txBody>
+          <a:bodyPr wrap="square" lIns="0" tIns="0" rIns="0" bIns="0" rtlCol="0" anchor="ctr"/>
+          <a:lstStyle/>
+          <a:p>
+            <a:pPr indent="0" marL="0">
+              <a:buNone/>
+            </a:pPr>
+            <a:r>
+              <a:rPr lang="en-US" sz="3800" dirty="0">
+                <a:solidFill>
+                  <a:srgbClr val="24313F"/>
+                </a:solidFill>
+                <a:latin typeface="Georgia" pitchFamily="34" charset="0"/>
+                <a:ea typeface="Georgia" pitchFamily="34" charset="-122"/>
+                <a:cs typeface="Georgia" pitchFamily="34" charset="-120"/>
+              </a:rPr>
+              <a:t>The tell</a:t>
+            </a:r>
+            <a:endParaRPr lang="en-US" sz="3800" dirty="0"/>
+          </a:p>
+        </p:txBody>
+      </p:sp>
+      <p:sp>
+        <p:nvSpPr>
+          <p:cNvPr id="6" name="Text 4"/>
+          <p:cNvSpPr/>
+          <p:nvPr/>
+        </p:nvSpPr>
+        <p:spPr>
+          <a:xfrm>
+            <a:off x="822960" y="2011680"/>
+            <a:ext cx="4846320" cy="502920"/>
+          </a:xfrm>
+          <a:prstGeom prst="rect">
+            <a:avLst/>
+          </a:prstGeom>
+          <a:noFill/>
+          <a:ln/>
+        </p:spPr>
+        <p:txBody>
+          <a:bodyPr wrap="square" lIns="0" tIns="0" rIns="0" bIns="0" rtlCol="0" anchor="ctr"/>
+          <a:lstStyle/>
+          <a:p>
+            <a:pPr indent="0" marL="0">
+              <a:buNone/>
+            </a:pPr>
+            <a:r>
+              <a:rPr lang="en-US" sz="2400" dirty="0">
+                <a:solidFill>
+                  <a:srgbClr val="7A7F72"/>
+                </a:solidFill>
+                <a:latin typeface="Georgia" pitchFamily="34" charset="0"/>
+                <a:ea typeface="Georgia" pitchFamily="34" charset="-122"/>
+                <a:cs typeface="Georgia" pitchFamily="34" charset="-120"/>
+              </a:rPr>
+              <a:t>A description</a:t>
+            </a:r>
+            <a:endParaRPr lang="en-US" sz="2400" dirty="0"/>
+          </a:p>
+        </p:txBody>
+      </p:sp>
+      <p:sp>
+        <p:nvSpPr>
+          <p:cNvPr id="7" name="Shape 5"/>
+          <p:cNvSpPr/>
+          <p:nvPr/>
+        </p:nvSpPr>
+        <p:spPr>
+          <a:xfrm>
+            <a:off x="822960" y="2560320"/>
+            <a:ext cx="4754880" cy="0"/>
+          </a:xfrm>
+          <a:prstGeom prst="line">
+            <a:avLst/>
+          </a:prstGeom>
+          <a:noFill/>
+          <a:ln w="9525">
+            <a:solidFill>
+              <a:srgbClr val="D9D4C4"/>
+            </a:solidFill>
+            <a:prstDash val="solid"/>
+          </a:ln>
+        </p:spPr>
+      </p:sp>
+      <p:sp>
+        <p:nvSpPr>
+          <p:cNvPr id="8" name="Text 6"/>
+          <p:cNvSpPr/>
+          <p:nvPr/>
+        </p:nvSpPr>
+        <p:spPr>
+          <a:xfrm>
+            <a:off x="822960" y="2697480"/>
+            <a:ext cx="4846320" cy="2194560"/>
+          </a:xfrm>
+          <a:prstGeom prst="rect">
+            <a:avLst/>
+          </a:prstGeom>
+          <a:noFill/>
+          <a:ln/>
+        </p:spPr>
+        <p:txBody>
+          <a:bodyPr wrap="square" lIns="0" tIns="0" rIns="0" bIns="0" rtlCol="0" anchor="t"/>
+          <a:lstStyle/>
+          <a:p>
+            <a:pPr indent="0" marL="0">
+              <a:lnSpc>
+                <a:spcPts val="2400"/>
+              </a:lnSpc>
+              <a:buNone/>
+            </a:pPr>
+            <a:r>
+              <a:rPr lang="en-US" sz="1700" dirty="0">
+                <a:solidFill>
+                  <a:srgbClr val="24313F"/>
+                </a:solidFill>
+                <a:latin typeface="Georgia" pitchFamily="34" charset="0"/>
+                <a:ea typeface="Georgia" pitchFamily="34" charset="-122"/>
+                <a:cs typeface="Georgia" pitchFamily="34" charset="-120"/>
+              </a:rPr>
+              <a:t>contains a sequence of events. It says what you did: we filmed, then we edited, then we uploaded.</a:t>
+            </a:r>
+            <a:endParaRPr lang="en-US" sz="1700" dirty="0"/>
+          </a:p>
+        </p:txBody>
+      </p:sp>
+      <p:sp>
+        <p:nvSpPr>
+          <p:cNvPr id="9" name="Text 7"/>
+          <p:cNvSpPr/>
+          <p:nvPr/>
+        </p:nvSpPr>
+        <p:spPr>
+          <a:xfrm>
+            <a:off x="6309360" y="2011680"/>
+            <a:ext cx="4846320" cy="502920"/>
+          </a:xfrm>
+          <a:prstGeom prst="rect">
+            <a:avLst/>
+          </a:prstGeom>
+          <a:noFill/>
+          <a:ln/>
+        </p:spPr>
+        <p:txBody>
+          <a:bodyPr wrap="square" lIns="0" tIns="0" rIns="0" bIns="0" rtlCol="0" anchor="ctr"/>
+          <a:lstStyle/>
+          <a:p>
+            <a:pPr indent="0" marL="0">
+              <a:buNone/>
+            </a:pPr>
+            <a:r>
+              <a:rPr lang="en-US" sz="2400" dirty="0">
+                <a:solidFill>
+                  <a:srgbClr val="4A6B5D"/>
+                </a:solidFill>
+                <a:latin typeface="Georgia" pitchFamily="34" charset="0"/>
+                <a:ea typeface="Georgia" pitchFamily="34" charset="-122"/>
+                <a:cs typeface="Georgia" pitchFamily="34" charset="-120"/>
+              </a:rPr>
+              <a:t>A reflection</a:t>
+            </a:r>
+            <a:endParaRPr lang="en-US" sz="2400" dirty="0"/>
+          </a:p>
+        </p:txBody>
+      </p:sp>
+      <p:sp>
+        <p:nvSpPr>
+          <p:cNvPr id="10" name="Shape 8"/>
+          <p:cNvSpPr/>
+          <p:nvPr/>
+        </p:nvSpPr>
+        <p:spPr>
+          <a:xfrm>
+            <a:off x="6309360" y="2560320"/>
+            <a:ext cx="4754880" cy="0"/>
+          </a:xfrm>
+          <a:prstGeom prst="line">
+            <a:avLst/>
+          </a:prstGeom>
+          <a:noFill/>
+          <a:ln w="9525">
+            <a:solidFill>
+              <a:srgbClr val="D9D4C4"/>
+            </a:solidFill>
+            <a:prstDash val="solid"/>
+          </a:ln>
+        </p:spPr>
+      </p:sp>
+      <p:sp>
+        <p:nvSpPr>
+          <p:cNvPr id="11" name="Text 9"/>
+          <p:cNvSpPr/>
+          <p:nvPr/>
+        </p:nvSpPr>
+        <p:spPr>
+          <a:xfrm>
+            <a:off x="6309360" y="2697480"/>
+            <a:ext cx="4846320" cy="2194560"/>
+          </a:xfrm>
+          <a:prstGeom prst="rect">
+            <a:avLst/>
+          </a:prstGeom>
+          <a:noFill/>
+          <a:ln/>
+        </p:spPr>
+        <p:txBody>
+          <a:bodyPr wrap="square" lIns="0" tIns="0" rIns="0" bIns="0" rtlCol="0" anchor="t"/>
+          <a:lstStyle/>
+          <a:p>
+            <a:pPr indent="0" marL="0">
+              <a:lnSpc>
+                <a:spcPts val="2400"/>
+              </a:lnSpc>
+              <a:buNone/>
+            </a:pPr>
+            <a:r>
+              <a:rPr lang="en-US" sz="1700" dirty="0">
+                <a:solidFill>
+                  <a:srgbClr val="24313F"/>
+                </a:solidFill>
+                <a:latin typeface="Georgia" pitchFamily="34" charset="0"/>
+                <a:ea typeface="Georgia" pitchFamily="34" charset="-122"/>
+                <a:cs typeface="Georgia" pitchFamily="34" charset="-120"/>
+              </a:rPr>
+              <a:t>contains a decision, a reason, or a change. It says why, and what you would do differently.</a:t>
+            </a:r>
+            <a:endParaRPr lang="en-US" sz="1700" dirty="0"/>
+          </a:p>
+        </p:txBody>
+      </p:sp>
+      <p:sp>
+        <p:nvSpPr>
+          <p:cNvPr id="12" name="Shape 10"/>
+          <p:cNvSpPr/>
+          <p:nvPr/>
+        </p:nvSpPr>
+        <p:spPr>
+          <a:xfrm>
+            <a:off x="822960" y="6382512"/>
+            <a:ext cx="10543032" cy="0"/>
+          </a:xfrm>
+          <a:prstGeom prst="line">
+            <a:avLst/>
+          </a:prstGeom>
+          <a:noFill/>
+          <a:ln w="9525">
+            <a:solidFill>
+              <a:srgbClr val="D9D4C4"/>
+            </a:solidFill>
+            <a:prstDash val="solid"/>
+          </a:ln>
+        </p:spPr>
+      </p:sp>
+      <p:sp>
+        <p:nvSpPr>
+          <p:cNvPr id="13" name="Text 11"/>
+          <p:cNvSpPr/>
+          <p:nvPr/>
+        </p:nvSpPr>
+        <p:spPr>
+          <a:xfrm>
+            <a:off x="822960" y="6419088"/>
+            <a:ext cx="7315200" cy="274320"/>
+          </a:xfrm>
+          <a:prstGeom prst="rect">
+            <a:avLst/>
+          </a:prstGeom>
+          <a:noFill/>
+          <a:ln/>
+        </p:spPr>
+        <p:txBody>
+          <a:bodyPr wrap="square" lIns="0" tIns="0" rIns="0" bIns="0" rtlCol="0" anchor="ctr"/>
+          <a:lstStyle/>
+          <a:p>
+            <a:pPr indent="0" marL="0">
+              <a:buNone/>
+            </a:pPr>
+            <a:r>
+              <a:rPr lang="en-US" sz="900" spc="150" kern="0" dirty="0">
+                <a:solidFill>
+                  <a:srgbClr val="7A7F72"/>
+                </a:solidFill>
+                <a:latin typeface="Arial" pitchFamily="34" charset="0"/>
+                <a:ea typeface="Arial" pitchFamily="34" charset="-122"/>
+                <a:cs typeface="Arial" pitchFamily="34" charset="-120"/>
+              </a:rPr>
+              <a:t>MEDIA STUDIES 9607 · SEMESTER I</a:t>
+            </a:r>
+            <a:endParaRPr lang="en-US" sz="900" dirty="0"/>
+          </a:p>
+        </p:txBody>
+      </p:sp>
+      <p:sp>
+        <p:nvSpPr>
+          <p:cNvPr id="14" name="Text 12"/>
+          <p:cNvSpPr/>
+          <p:nvPr/>
+        </p:nvSpPr>
+        <p:spPr>
+          <a:xfrm>
+            <a:off x="10268712" y="6355080"/>
+            <a:ext cx="1097280" cy="365760"/>
+          </a:xfrm>
+          <a:prstGeom prst="rect">
+            <a:avLst/>
+          </a:prstGeom>
+          <a:noFill/>
+          <a:ln/>
+        </p:spPr>
+        <p:txBody>
+          <a:bodyPr wrap="square" lIns="0" tIns="0" rIns="0" bIns="0" rtlCol="0" anchor="ctr"/>
+          <a:lstStyle/>
+          <a:p>
+            <a:pPr algn="r" indent="0" marL="0">
+              <a:buNone/>
+            </a:pPr>
+            <a:r>
+              <a:rPr lang="en-US" sz="1600" dirty="0">
+                <a:solidFill>
+                  <a:srgbClr val="A3C1AD"/>
+                </a:solidFill>
+                <a:latin typeface="Georgia" pitchFamily="34" charset="0"/>
+                <a:ea typeface="Georgia" pitchFamily="34" charset="-122"/>
+                <a:cs typeface="Georgia" pitchFamily="34" charset="-120"/>
+              </a:rPr>
+              <a:t>03</a:t>
+            </a:r>
+            <a:endParaRPr lang="en-US" sz="1600" dirty="0"/>
+          </a:p>
+        </p:txBody>
+      </p:sp>
+    </p:spTree>
+  </p:cSld>
+  <p:clrMapOvr>
+    <a:masterClrMapping/>
+  </p:clrMapOvr>
+</p:sld>
+</file>
+
+<file path=ppt/slides/slide6.xml><?xml version="1.0" encoding="utf-8"?>
+<p:sld xmlns:a="http://schemas.openxmlformats.org/drawingml/2006/main" xmlns:r="http://schemas.openxmlformats.org/officeDocument/2006/relationships" xmlns:p="http://schemas.openxmlformats.org/presentationml/2006/main">
+  <p:cSld name="Slide 6">
     <p:bg>
       <p:bgPr>
         <a:solidFill>
@@ -4084,34 +6272,34 @@
         </p:nvSpPr>
         <p:spPr>
           <a:xfrm>
-            <a:off x="502920" y="548640"/>
-            <a:ext cx="1828800" cy="1828800"/>
-          </a:xfrm>
-          <a:prstGeom prst="rect">
-            <a:avLst/>
-          </a:prstGeom>
-          <a:noFill/>
-          <a:ln/>
-        </p:spPr>
-        <p:txBody>
-          <a:bodyPr wrap="square" lIns="0" tIns="0" rIns="0" bIns="0" rtlCol="0" anchor="t"/>
-          <a:lstStyle/>
-          <a:p>
-            <a:pPr indent="0" marL="0">
-              <a:buNone/>
-            </a:pPr>
-            <a:r>
-              <a:rPr lang="en-US" sz="20000" dirty="0">
-                <a:solidFill>
-                  <a:srgbClr val="A3C1AD"/>
-                </a:solidFill>
-                <a:latin typeface="Georgia" pitchFamily="34" charset="0"/>
-                <a:ea typeface="Georgia" pitchFamily="34" charset="-122"/>
-                <a:cs typeface="Georgia" pitchFamily="34" charset="-120"/>
-              </a:rPr>
-              <a:t>“</a:t>
-            </a:r>
-            <a:endParaRPr lang="en-US" sz="20000" dirty="0"/>
+            <a:off x="822960" y="1554480"/>
+            <a:ext cx="8229600" cy="274320"/>
+          </a:xfrm>
+          <a:prstGeom prst="rect">
+            <a:avLst/>
+          </a:prstGeom>
+          <a:noFill/>
+          <a:ln/>
+        </p:spPr>
+        <p:txBody>
+          <a:bodyPr wrap="square" lIns="0" tIns="0" rIns="0" bIns="0" rtlCol="0" anchor="ctr"/>
+          <a:lstStyle/>
+          <a:p>
+            <a:pPr algn="l" indent="0" marL="0">
+              <a:buNone/>
+            </a:pPr>
+            <a:r>
+              <a:rPr lang="en-US" sz="1100" b="1" spc="250" kern="0" dirty="0">
+                <a:solidFill>
+                  <a:srgbClr val="4A6B5D"/>
+                </a:solidFill>
+                <a:latin typeface="Arial" pitchFamily="34" charset="0"/>
+                <a:ea typeface="Arial" pitchFamily="34" charset="-122"/>
+                <a:cs typeface="Arial" pitchFamily="34" charset="-120"/>
+              </a:rPr>
+              <a:t>THE TEST EVERY SENTENCE TAKES</a:t>
+            </a:r>
+            <a:endParaRPr lang="en-US" sz="1100" dirty="0"/>
           </a:p>
         </p:txBody>
       </p:sp>
@@ -4123,7 +6311,7 @@
         </p:nvSpPr>
         <p:spPr>
           <a:xfrm>
-            <a:off x="822960" y="1920240"/>
+            <a:off x="822960" y="2103120"/>
             <a:ext cx="10424160" cy="2194560"/>
           </a:xfrm>
           <a:prstGeom prst="rect">
@@ -4236,269 +6424,6 @@
               <a:t>Every reflective sentence contains at least one. If a sentence contains none of the three, it is description; cut it or convert it.</a:t>
             </a:r>
             <a:endParaRPr lang="en-US" sz="1400" dirty="0"/>
-          </a:p>
-        </p:txBody>
-      </p:sp>
-    </p:spTree>
-  </p:cSld>
-  <p:clrMapOvr>
-    <a:masterClrMapping/>
-  </p:clrMapOvr>
-</p:sld>
-</file>
-
-<file path=ppt/slides/slide6.xml><?xml version="1.0" encoding="utf-8"?>
-<p:sld xmlns:a="http://schemas.openxmlformats.org/drawingml/2006/main" xmlns:r="http://schemas.openxmlformats.org/officeDocument/2006/relationships" xmlns:p="http://schemas.openxmlformats.org/presentationml/2006/main">
-  <p:cSld name="Slide 6">
-    <p:bg>
-      <p:bgPr>
-        <a:solidFill>
-          <a:srgbClr val="FAF8F1"/>
-        </a:solidFill>
-      </p:bgPr>
-    </p:bg>
-    <p:spTree>
-      <p:nvGrpSpPr>
-        <p:cNvPr id="1" name=""/>
-        <p:cNvGrpSpPr/>
-        <p:nvPr/>
-      </p:nvGrpSpPr>
-      <p:grpSpPr>
-        <a:xfrm>
-          <a:off x="0" y="0"/>
-          <a:ext cx="0" cy="0"/>
-          <a:chOff x="0" y="0"/>
-          <a:chExt cx="0" cy="0"/>
-        </a:xfrm>
-      </p:grpSpPr>
-      <p:pic>
-        <p:nvPicPr>
-          <p:cNvPr id="2" name="Image 0" descr="/Users/dogan/Documents/Vaults/Courses/wiki/classes/media-studies/decks/_build/img/crops/vangogh-self_a664.jpg">    </p:cNvPr>
-          <p:cNvPicPr>
-            <a:picLocks noChangeAspect="1"/>
-          </p:cNvPicPr>
-          <p:nvPr/>
-        </p:nvPicPr>
-        <p:blipFill>
-          <a:blip r:embed="rId1"/>
-          <a:stretch>
-            <a:fillRect/>
-          </a:stretch>
-        </p:blipFill>
-        <p:spPr>
-          <a:xfrm>
-            <a:off x="7635240" y="0"/>
-            <a:ext cx="4553712" cy="6858000"/>
-          </a:xfrm>
-          <a:prstGeom prst="rect">
-            <a:avLst/>
-          </a:prstGeom>
-        </p:spPr>
-      </p:pic>
-      <p:sp>
-        <p:nvSpPr>
-          <p:cNvPr id="3" name="Text 0"/>
-          <p:cNvSpPr/>
-          <p:nvPr/>
-        </p:nvSpPr>
-        <p:spPr>
-          <a:xfrm>
-            <a:off x="7818120" y="6126480"/>
-            <a:ext cx="4187952" cy="365760"/>
-          </a:xfrm>
-          <a:prstGeom prst="rect">
-            <a:avLst/>
-          </a:prstGeom>
-          <a:solidFill>
-            <a:srgbClr val="FAF8F1"/>
-          </a:solidFill>
-          <a:ln/>
-        </p:spPr>
-        <p:txBody>
-          <a:bodyPr wrap="square" lIns="0" tIns="0" rIns="0" bIns="0" rtlCol="0" anchor="ctr"/>
-          <a:lstStyle/>
-          <a:p>
-            <a:pPr indent="0" marL="0">
-              <a:buNone/>
-            </a:pPr>
-            <a:r>
-              <a:rPr lang="en-US" sz="950" spc="50" kern="0" dirty="0">
-                <a:solidFill>
-                  <a:srgbClr val="7A7F72"/>
-                </a:solidFill>
-                <a:latin typeface="Arial" pitchFamily="34" charset="0"/>
-                <a:ea typeface="Arial" pitchFamily="34" charset="-122"/>
-                <a:cs typeface="Arial" pitchFamily="34" charset="-120"/>
-              </a:rPr>
-              <a:t>Vincent van Gogh, Self-Portrait, 1889</a:t>
-            </a:r>
-            <a:endParaRPr lang="en-US" sz="950" dirty="0"/>
-          </a:p>
-        </p:txBody>
-      </p:sp>
-      <p:sp>
-        <p:nvSpPr>
-          <p:cNvPr id="4" name="Text 1"/>
-          <p:cNvSpPr/>
-          <p:nvPr/>
-        </p:nvSpPr>
-        <p:spPr>
-          <a:xfrm>
-            <a:off x="822960" y="685800"/>
-            <a:ext cx="5486400" cy="274320"/>
-          </a:xfrm>
-          <a:prstGeom prst="rect">
-            <a:avLst/>
-          </a:prstGeom>
-          <a:noFill/>
-          <a:ln/>
-        </p:spPr>
-        <p:txBody>
-          <a:bodyPr wrap="square" lIns="0" tIns="0" rIns="0" bIns="0" rtlCol="0" anchor="ctr"/>
-          <a:lstStyle/>
-          <a:p>
-            <a:pPr algn="l" indent="0" marL="0">
-              <a:buNone/>
-            </a:pPr>
-            <a:r>
-              <a:rPr lang="en-US" sz="1100" b="1" spc="250" kern="0" dirty="0">
-                <a:solidFill>
-                  <a:srgbClr val="4A6B5D"/>
-                </a:solidFill>
-                <a:latin typeface="Arial" pitchFamily="34" charset="0"/>
-                <a:ea typeface="Arial" pitchFamily="34" charset="-122"/>
-                <a:cs typeface="Arial" pitchFamily="34" charset="-120"/>
-              </a:rPr>
-              <a:t>THE MAKER, TURNED INWARD</a:t>
-            </a:r>
-            <a:endParaRPr lang="en-US" sz="1100" dirty="0"/>
-          </a:p>
-        </p:txBody>
-      </p:sp>
-      <p:sp>
-        <p:nvSpPr>
-          <p:cNvPr id="5" name="Shape 2"/>
-          <p:cNvSpPr/>
-          <p:nvPr/>
-        </p:nvSpPr>
-        <p:spPr>
-          <a:xfrm>
-            <a:off x="822960" y="1051560"/>
-            <a:ext cx="6492240" cy="0"/>
-          </a:xfrm>
-          <a:prstGeom prst="line">
-            <a:avLst/>
-          </a:prstGeom>
-          <a:noFill/>
-          <a:ln w="9525">
-            <a:solidFill>
-              <a:srgbClr val="D9D4C4"/>
-            </a:solidFill>
-            <a:prstDash val="solid"/>
-          </a:ln>
-        </p:spPr>
-      </p:sp>
-      <p:sp>
-        <p:nvSpPr>
-          <p:cNvPr id="6" name="Text 3"/>
-          <p:cNvSpPr/>
-          <p:nvPr/>
-        </p:nvSpPr>
-        <p:spPr>
-          <a:xfrm>
-            <a:off x="822960" y="1234440"/>
-            <a:ext cx="6492240" cy="1371600"/>
-          </a:xfrm>
-          <a:prstGeom prst="rect">
-            <a:avLst/>
-          </a:prstGeom>
-          <a:noFill/>
-          <a:ln/>
-        </p:spPr>
-        <p:txBody>
-          <a:bodyPr wrap="square" lIns="0" tIns="0" rIns="0" bIns="0" rtlCol="0" anchor="t"/>
-          <a:lstStyle/>
-          <a:p>
-            <a:pPr indent="0" marL="0">
-              <a:lnSpc>
-                <a:spcPts val="4200"/>
-              </a:lnSpc>
-              <a:buNone/>
-            </a:pPr>
-            <a:r>
-              <a:rPr lang="en-US" sz="4000" dirty="0">
-                <a:solidFill>
-                  <a:srgbClr val="24313F"/>
-                </a:solidFill>
-                <a:latin typeface="Georgia" pitchFamily="34" charset="0"/>
-                <a:ea typeface="Georgia" pitchFamily="34" charset="-122"/>
-                <a:cs typeface="Georgia" pitchFamily="34" charset="-120"/>
-              </a:rPr>
-              <a:t>Examine your</a:t>
-            </a:r>
-            <a:endParaRPr lang="en-US" sz="4000" dirty="0"/>
-          </a:p>
-          <a:p>
-            <a:pPr indent="0" marL="0">
-              <a:lnSpc>
-                <a:spcPts val="4200"/>
-              </a:lnSpc>
-              <a:buNone/>
-            </a:pPr>
-            <a:r>
-              <a:rPr lang="en-US" sz="4000" dirty="0">
-                <a:solidFill>
-                  <a:srgbClr val="24313F"/>
-                </a:solidFill>
-                <a:latin typeface="Georgia" pitchFamily="34" charset="0"/>
-                <a:ea typeface="Georgia" pitchFamily="34" charset="-122"/>
-                <a:cs typeface="Georgia" pitchFamily="34" charset="-120"/>
-              </a:rPr>
-              <a:t>own decisions</a:t>
-            </a:r>
-            <a:endParaRPr lang="en-US" sz="4000" dirty="0"/>
-          </a:p>
-        </p:txBody>
-      </p:sp>
-      <p:sp>
-        <p:nvSpPr>
-          <p:cNvPr id="7" name="Text 4"/>
-          <p:cNvSpPr/>
-          <p:nvPr/>
-        </p:nvSpPr>
-        <p:spPr>
-          <a:xfrm>
-            <a:off x="822960" y="2743200"/>
-            <a:ext cx="6583680" cy="2926080"/>
-          </a:xfrm>
-          <a:prstGeom prst="rect">
-            <a:avLst/>
-          </a:prstGeom>
-          <a:noFill/>
-          <a:ln/>
-        </p:spPr>
-        <p:txBody>
-          <a:bodyPr wrap="square" lIns="0" tIns="0" rIns="0" bIns="0" rtlCol="0" anchor="t"/>
-          <a:lstStyle/>
-          <a:p>
-            <a:pPr indent="0" marL="0">
-              <a:lnSpc>
-                <a:spcPts val="2400"/>
-              </a:lnSpc>
-              <a:buNone/>
-            </a:pPr>
-            <a:r>
-              <a:rPr lang="en-US" sz="1700" dirty="0">
-                <a:solidFill>
-                  <a:srgbClr val="24313F"/>
-                </a:solidFill>
-                <a:latin typeface="Georgia" pitchFamily="34" charset="0"/>
-                <a:ea typeface="Georgia" pitchFamily="34" charset="-122"/>
-                <a:cs typeface="Georgia" pitchFamily="34" charset="-120"/>
-              </a:rPr>
-              <a:t>A self-portrait is the maker studying the maker. The CCR asks the same of you: not to describe the product, but to examine the person who made the choices. Add one honest sentence that flatters nobody. We chose the location because it was available, and it shows in the lighting. Honesty is what examiners read as reflection.</a:t>
-            </a:r>
-            <a:endParaRPr lang="en-US" sz="1700" dirty="0"/>
           </a:p>
         </p:txBody>
       </p:sp>
@@ -4534,55 +6459,81 @@
           <a:chExt cx="0" cy="0"/>
         </a:xfrm>
       </p:grpSpPr>
-      <p:sp>
-        <p:nvSpPr>
-          <p:cNvPr id="2" name="Text 0"/>
-          <p:cNvSpPr/>
-          <p:nvPr/>
-        </p:nvSpPr>
-        <p:spPr>
-          <a:xfrm>
-            <a:off x="822960" y="457200"/>
-            <a:ext cx="6400800" cy="274320"/>
-          </a:xfrm>
-          <a:prstGeom prst="rect">
-            <a:avLst/>
-          </a:prstGeom>
-          <a:noFill/>
+      <p:pic>
+        <p:nvPicPr>
+          <p:cNvPr id="2" name="Image 0" descr="/Users/dogan/Documents/Vaults/Courses/wiki/classes/media-studies/decks/_build/img/crops/rivera-self_a664.jpg">    </p:cNvPr>
+          <p:cNvPicPr>
+            <a:picLocks noChangeAspect="1"/>
+          </p:cNvPicPr>
+          <p:nvPr/>
+        </p:nvPicPr>
+        <p:blipFill>
+          <a:blip r:embed="rId1"/>
+          <a:stretch>
+            <a:fillRect/>
+          </a:stretch>
+        </p:blipFill>
+        <p:spPr>
+          <a:xfrm>
+            <a:off x="7635240" y="0"/>
+            <a:ext cx="4553712" cy="6858000"/>
+          </a:xfrm>
+          <a:prstGeom prst="rect">
+            <a:avLst/>
+          </a:prstGeom>
+        </p:spPr>
+      </p:pic>
+      <p:sp>
+        <p:nvSpPr>
+          <p:cNvPr id="3" name="Text 0"/>
+          <p:cNvSpPr/>
+          <p:nvPr/>
+        </p:nvSpPr>
+        <p:spPr>
+          <a:xfrm>
+            <a:off x="7818120" y="6126480"/>
+            <a:ext cx="4187952" cy="365760"/>
+          </a:xfrm>
+          <a:prstGeom prst="rect">
+            <a:avLst/>
+          </a:prstGeom>
+          <a:solidFill>
+            <a:srgbClr val="FAF8F1"/>
+          </a:solidFill>
           <a:ln/>
         </p:spPr>
         <p:txBody>
           <a:bodyPr wrap="square" lIns="0" tIns="0" rIns="0" bIns="0" rtlCol="0" anchor="ctr"/>
           <a:lstStyle/>
           <a:p>
-            <a:pPr algn="l" indent="0" marL="0">
-              <a:buNone/>
-            </a:pPr>
-            <a:r>
-              <a:rPr lang="en-US" sz="1100" b="1" spc="250" kern="0" dirty="0">
-                <a:solidFill>
-                  <a:srgbClr val="4A6B5D"/>
+            <a:pPr indent="0" marL="0">
+              <a:buNone/>
+            </a:pPr>
+            <a:r>
+              <a:rPr lang="en-US" sz="950" spc="50" kern="0" dirty="0">
+                <a:solidFill>
+                  <a:srgbClr val="7A7F72"/>
                 </a:solidFill>
                 <a:latin typeface="Arial" pitchFamily="34" charset="0"/>
                 <a:ea typeface="Arial" pitchFamily="34" charset="-122"/>
                 <a:cs typeface="Arial" pitchFamily="34" charset="-120"/>
               </a:rPr>
-              <a:t>THE PRODUCTION DIARIES PAY OUT</a:t>
-            </a:r>
-            <a:endParaRPr lang="en-US" sz="1100" dirty="0"/>
-          </a:p>
-        </p:txBody>
-      </p:sp>
-      <p:sp>
-        <p:nvSpPr>
-          <p:cNvPr id="3" name="Text 1"/>
-          <p:cNvSpPr/>
-          <p:nvPr/>
-        </p:nvSpPr>
-        <p:spPr>
-          <a:xfrm>
-            <a:off x="6793992" y="457200"/>
-            <a:ext cx="4572000" cy="274320"/>
+              <a:t>Diego Rivera, Self-Portrait, 1907</a:t>
+            </a:r>
+            <a:endParaRPr lang="en-US" sz="950" dirty="0"/>
+          </a:p>
+        </p:txBody>
+      </p:sp>
+      <p:sp>
+        <p:nvSpPr>
+          <p:cNvPr id="4" name="Text 1"/>
+          <p:cNvSpPr/>
+          <p:nvPr/>
+        </p:nvSpPr>
+        <p:spPr>
+          <a:xfrm>
+            <a:off x="822960" y="685800"/>
+            <a:ext cx="5486400" cy="274320"/>
           </a:xfrm>
           <a:prstGeom prst="rect">
             <a:avLst/>
@@ -4594,19 +6545,19 @@
           <a:bodyPr wrap="square" lIns="0" tIns="0" rIns="0" bIns="0" rtlCol="0" anchor="ctr"/>
           <a:lstStyle/>
           <a:p>
-            <a:pPr algn="r" indent="0" marL="0">
+            <a:pPr algn="l" indent="0" marL="0">
               <a:buNone/>
             </a:pPr>
             <a:r>
               <a:rPr lang="en-US" sz="1100" b="1" spc="250" kern="0" dirty="0">
                 <a:solidFill>
-                  <a:srgbClr val="7A7F72"/>
+                  <a:srgbClr val="4A6B5D"/>
                 </a:solidFill>
                 <a:latin typeface="Arial" pitchFamily="34" charset="0"/>
                 <a:ea typeface="Arial" pitchFamily="34" charset="-122"/>
                 <a:cs typeface="Arial" pitchFamily="34" charset="-120"/>
               </a:rPr>
-              <a:t>ISSUED AT THE L05 LOCK, HARVESTED NOW</a:t>
+              <a:t>THE MAKER, TURNED INWARD</a:t>
             </a:r>
             <a:endParaRPr lang="en-US" sz="1100" dirty="0"/>
           </a:p>
@@ -4614,14 +6565,14 @@
       </p:sp>
       <p:sp>
         <p:nvSpPr>
-          <p:cNvPr id="4" name="Shape 2"/>
-          <p:cNvSpPr/>
-          <p:nvPr/>
-        </p:nvSpPr>
-        <p:spPr>
-          <a:xfrm>
-            <a:off x="822960" y="786384"/>
-            <a:ext cx="10543032" cy="0"/>
+          <p:cNvPr id="5" name="Shape 2"/>
+          <p:cNvSpPr/>
+          <p:nvPr/>
+        </p:nvSpPr>
+        <p:spPr>
+          <a:xfrm>
+            <a:off x="822960" y="1051560"/>
+            <a:ext cx="6492240" cy="0"/>
           </a:xfrm>
           <a:prstGeom prst="line">
             <a:avLst/>
@@ -4637,30 +6588,33 @@
       </p:sp>
       <p:sp>
         <p:nvSpPr>
-          <p:cNvPr id="5" name="Text 3"/>
-          <p:cNvSpPr/>
-          <p:nvPr/>
-        </p:nvSpPr>
-        <p:spPr>
-          <a:xfrm>
-            <a:off x="822960" y="1280160"/>
-            <a:ext cx="10543032" cy="914400"/>
-          </a:xfrm>
-          <a:prstGeom prst="rect">
-            <a:avLst/>
-          </a:prstGeom>
-          <a:noFill/>
-          <a:ln/>
-        </p:spPr>
-        <p:txBody>
-          <a:bodyPr wrap="square" lIns="0" tIns="0" rIns="0" bIns="0" rtlCol="0" anchor="ctr"/>
+          <p:cNvPr id="6" name="Text 3"/>
+          <p:cNvSpPr/>
+          <p:nvPr/>
+        </p:nvSpPr>
+        <p:spPr>
+          <a:xfrm>
+            <a:off x="822960" y="1234440"/>
+            <a:ext cx="6492240" cy="1371600"/>
+          </a:xfrm>
+          <a:prstGeom prst="rect">
+            <a:avLst/>
+          </a:prstGeom>
+          <a:noFill/>
+          <a:ln/>
+        </p:spPr>
+        <p:txBody>
+          <a:bodyPr wrap="square" lIns="0" tIns="0" rIns="0" bIns="0" rtlCol="0" anchor="t"/>
           <a:lstStyle/>
           <a:p>
             <a:pPr indent="0" marL="0">
-              <a:buNone/>
-            </a:pPr>
-            <a:r>
-              <a:rPr lang="en-US" sz="3800" dirty="0">
+              <a:lnSpc>
+                <a:spcPts val="4200"/>
+              </a:lnSpc>
+              <a:buNone/>
+            </a:pPr>
+            <a:r>
+              <a:rPr lang="en-US" sz="4000" dirty="0">
                 <a:solidFill>
                   <a:srgbClr val="24313F"/>
                 </a:solidFill>
@@ -4668,64 +6622,19 @@
                 <a:ea typeface="Georgia" pitchFamily="34" charset="-122"/>
                 <a:cs typeface="Georgia" pitchFamily="34" charset="-120"/>
               </a:rPr>
-              <a:t>A ready-made reflection bank</a:t>
-            </a:r>
-            <a:endParaRPr lang="en-US" sz="3800" dirty="0"/>
-          </a:p>
-        </p:txBody>
-      </p:sp>
-      <p:sp>
-        <p:nvSpPr>
-          <p:cNvPr id="6" name="Shape 4"/>
-          <p:cNvSpPr/>
-          <p:nvPr/>
-        </p:nvSpPr>
-        <p:spPr>
-          <a:xfrm>
-            <a:off x="822960" y="2514600"/>
-            <a:ext cx="914400" cy="0"/>
-          </a:xfrm>
-          <a:prstGeom prst="line">
-            <a:avLst/>
-          </a:prstGeom>
-          <a:noFill/>
-          <a:ln w="31750">
-            <a:solidFill>
-              <a:srgbClr val="8C3A38"/>
-            </a:solidFill>
-            <a:prstDash val="solid"/>
-          </a:ln>
-        </p:spPr>
-      </p:sp>
-      <p:sp>
-        <p:nvSpPr>
-          <p:cNvPr id="7" name="Text 5"/>
-          <p:cNvSpPr/>
-          <p:nvPr/>
-        </p:nvSpPr>
-        <p:spPr>
-          <a:xfrm>
-            <a:off x="822960" y="2743200"/>
-            <a:ext cx="9875520" cy="1920240"/>
-          </a:xfrm>
-          <a:prstGeom prst="rect">
-            <a:avLst/>
-          </a:prstGeom>
-          <a:noFill/>
-          <a:ln/>
-        </p:spPr>
-        <p:txBody>
-          <a:bodyPr wrap="square" lIns="0" tIns="0" rIns="0" bIns="0" rtlCol="0" anchor="t"/>
-          <a:lstStyle/>
+              <a:t>Examine your</a:t>
+            </a:r>
+            <a:endParaRPr lang="en-US" sz="4000" dirty="0"/>
+          </a:p>
           <a:p>
             <a:pPr indent="0" marL="0">
               <a:lnSpc>
-                <a:spcPts val="2800"/>
+                <a:spcPts val="4200"/>
               </a:lnSpc>
               <a:buNone/>
             </a:pPr>
             <a:r>
-              <a:rPr lang="en-US" sz="2000" dirty="0">
+              <a:rPr lang="en-US" sz="4000" dirty="0">
                 <a:solidFill>
                   <a:srgbClr val="24313F"/>
                 </a:solidFill>
@@ -4733,169 +6642,51 @@
                 <a:ea typeface="Georgia" pitchFamily="34" charset="-122"/>
                 <a:cs typeface="Georgia" pitchFamily="34" charset="-120"/>
               </a:rPr>
-              <a:t>Open the WS 6.4 diaries next to the drafts. Every entry in the decisions and consequences columns is already a reflection sentence: decided X because Y, consequence Z. This is why the lock's rule was documented decisions, not silent swaps. Transcribe the three best into the drafts.</a:t>
-            </a:r>
-            <a:endParaRPr lang="en-US" sz="2000" dirty="0"/>
-          </a:p>
-        </p:txBody>
-      </p:sp>
-      <p:sp>
-        <p:nvSpPr>
-          <p:cNvPr id="8" name="Shape 6"/>
-          <p:cNvSpPr/>
-          <p:nvPr/>
-        </p:nvSpPr>
-        <p:spPr>
-          <a:xfrm>
-            <a:off x="822960" y="4846320"/>
-            <a:ext cx="10543032" cy="777240"/>
-          </a:xfrm>
-          <a:prstGeom prst="rect">
-            <a:avLst/>
-          </a:prstGeom>
-          <a:solidFill>
-            <a:srgbClr val="E8EFE7"/>
-          </a:solidFill>
-          <a:ln/>
-        </p:spPr>
-      </p:sp>
-      <p:sp>
-        <p:nvSpPr>
-          <p:cNvPr id="9" name="Text 7"/>
-          <p:cNvSpPr/>
-          <p:nvPr/>
-        </p:nvSpPr>
-        <p:spPr>
-          <a:xfrm>
-            <a:off x="1097280" y="4846320"/>
-            <a:ext cx="9994392" cy="777240"/>
-          </a:xfrm>
-          <a:prstGeom prst="rect">
-            <a:avLst/>
-          </a:prstGeom>
-          <a:noFill/>
-          <a:ln/>
-        </p:spPr>
-        <p:txBody>
-          <a:bodyPr wrap="square" lIns="0" tIns="0" rIns="0" bIns="0" rtlCol="0" anchor="ctr"/>
+              <a:t>own decisions</a:t>
+            </a:r>
+            <a:endParaRPr lang="en-US" sz="4000" dirty="0"/>
+          </a:p>
+        </p:txBody>
+      </p:sp>
+      <p:sp>
+        <p:nvSpPr>
+          <p:cNvPr id="7" name="Text 4"/>
+          <p:cNvSpPr/>
+          <p:nvPr/>
+        </p:nvSpPr>
+        <p:spPr>
+          <a:xfrm>
+            <a:off x="822960" y="2743200"/>
+            <a:ext cx="6583680" cy="2926080"/>
+          </a:xfrm>
+          <a:prstGeom prst="rect">
+            <a:avLst/>
+          </a:prstGeom>
+          <a:noFill/>
+          <a:ln/>
+        </p:spPr>
+        <p:txBody>
+          <a:bodyPr wrap="square" lIns="0" tIns="0" rIns="0" bIns="0" rtlCol="0" anchor="t"/>
           <a:lstStyle/>
           <a:p>
             <a:pPr indent="0" marL="0">
-              <a:buNone/>
-            </a:pPr>
-            <a:r>
-              <a:rPr lang="en-US" sz="1900" i="1" dirty="0">
-                <a:solidFill>
-                  <a:srgbClr val="4A6B5D"/>
+              <a:lnSpc>
+                <a:spcPts val="2400"/>
+              </a:lnSpc>
+              <a:buNone/>
+            </a:pPr>
+            <a:r>
+              <a:rPr lang="en-US" sz="1700" dirty="0">
+                <a:solidFill>
+                  <a:srgbClr val="24313F"/>
                 </a:solidFill>
                 <a:latin typeface="Georgia" pitchFamily="34" charset="0"/>
                 <a:ea typeface="Georgia" pitchFamily="34" charset="-122"/>
                 <a:cs typeface="Georgia" pitchFamily="34" charset="-120"/>
               </a:rPr>
-              <a:t>Decided X, because Y. Consequence: Z.</a:t>
-            </a:r>
-            <a:endParaRPr lang="en-US" sz="1900" dirty="0"/>
-          </a:p>
-        </p:txBody>
-      </p:sp>
-      <p:sp>
-        <p:nvSpPr>
-          <p:cNvPr id="10" name="Shape 8"/>
-          <p:cNvSpPr/>
-          <p:nvPr/>
-        </p:nvSpPr>
-        <p:spPr>
-          <a:xfrm>
-            <a:off x="822960" y="6382512"/>
-            <a:ext cx="10543032" cy="0"/>
-          </a:xfrm>
-          <a:prstGeom prst="line">
-            <a:avLst/>
-          </a:prstGeom>
-          <a:noFill/>
-          <a:ln w="9525">
-            <a:solidFill>
-              <a:srgbClr val="D9D4C4"/>
-            </a:solidFill>
-            <a:prstDash val="solid"/>
-          </a:ln>
-        </p:spPr>
-      </p:sp>
-      <p:sp>
-        <p:nvSpPr>
-          <p:cNvPr id="11" name="Text 9"/>
-          <p:cNvSpPr/>
-          <p:nvPr/>
-        </p:nvSpPr>
-        <p:spPr>
-          <a:xfrm>
-            <a:off x="822960" y="6419088"/>
-            <a:ext cx="7315200" cy="274320"/>
-          </a:xfrm>
-          <a:prstGeom prst="rect">
-            <a:avLst/>
-          </a:prstGeom>
-          <a:noFill/>
-          <a:ln/>
-        </p:spPr>
-        <p:txBody>
-          <a:bodyPr wrap="square" lIns="0" tIns="0" rIns="0" bIns="0" rtlCol="0" anchor="ctr"/>
-          <a:lstStyle/>
-          <a:p>
-            <a:pPr indent="0" marL="0">
-              <a:buNone/>
-            </a:pPr>
-            <a:r>
-              <a:rPr lang="en-US" sz="900" spc="150" kern="0" dirty="0">
-                <a:solidFill>
-                  <a:srgbClr val="7A7F72"/>
-                </a:solidFill>
-                <a:latin typeface="Arial" pitchFamily="34" charset="0"/>
-                <a:ea typeface="Arial" pitchFamily="34" charset="-122"/>
-                <a:cs typeface="Arial" pitchFamily="34" charset="-120"/>
-              </a:rPr>
-              <a:t>MEDIA STUDIES 9607 · SEMESTER I</a:t>
-            </a:r>
-            <a:endParaRPr lang="en-US" sz="900" dirty="0"/>
-          </a:p>
-        </p:txBody>
-      </p:sp>
-      <p:sp>
-        <p:nvSpPr>
-          <p:cNvPr id="12" name="Text 10"/>
-          <p:cNvSpPr/>
-          <p:nvPr/>
-        </p:nvSpPr>
-        <p:spPr>
-          <a:xfrm>
-            <a:off x="10268712" y="6355080"/>
-            <a:ext cx="1097280" cy="365760"/>
-          </a:xfrm>
-          <a:prstGeom prst="rect">
-            <a:avLst/>
-          </a:prstGeom>
-          <a:noFill/>
-          <a:ln/>
-        </p:spPr>
-        <p:txBody>
-          <a:bodyPr wrap="square" lIns="0" tIns="0" rIns="0" bIns="0" rtlCol="0" anchor="ctr"/>
-          <a:lstStyle/>
-          <a:p>
-            <a:pPr algn="r" indent="0" marL="0">
-              <a:buNone/>
-            </a:pPr>
-            <a:r>
-              <a:rPr lang="en-US" sz="1600" dirty="0">
-                <a:solidFill>
-                  <a:srgbClr val="A3C1AD"/>
-                </a:solidFill>
-                <a:latin typeface="Georgia" pitchFamily="34" charset="0"/>
-                <a:ea typeface="Georgia" pitchFamily="34" charset="-122"/>
-                <a:cs typeface="Georgia" pitchFamily="34" charset="-120"/>
-              </a:rPr>
-              <a:t>03</a:t>
-            </a:r>
-            <a:endParaRPr lang="en-US" sz="1600" dirty="0"/>
+              <a:t>A self-portrait is the maker studying the maker, and this one is a twenty-year-old art student doing exactly what the CCR asks of you: examining his own work-in-progress self without flattery. The CCR asks the same of you: not to describe the product, but to examine the person who made the choices. Add one honest sentence that flatters nobody. We chose the location because it was available, and it shows in the lighting. Honesty is what examiners read as reflection.</a:t>
+            </a:r>
+            <a:endParaRPr lang="en-US" sz="1700" dirty="0"/>
           </a:p>
         </p:txBody>
       </p:sp>
@@ -4910,6 +6701,491 @@
 <file path=ppt/slides/slide8.xml><?xml version="1.0" encoding="utf-8"?>
 <p:sld xmlns:a="http://schemas.openxmlformats.org/drawingml/2006/main" xmlns:r="http://schemas.openxmlformats.org/officeDocument/2006/relationships" xmlns:p="http://schemas.openxmlformats.org/presentationml/2006/main">
   <p:cSld name="Slide 8">
+    <p:bg>
+      <p:bgPr>
+        <a:solidFill>
+          <a:srgbClr val="FAF8F1"/>
+        </a:solidFill>
+      </p:bgPr>
+    </p:bg>
+    <p:spTree>
+      <p:nvGrpSpPr>
+        <p:cNvPr id="1" name=""/>
+        <p:cNvGrpSpPr/>
+        <p:nvPr/>
+      </p:nvGrpSpPr>
+      <p:grpSpPr>
+        <a:xfrm>
+          <a:off x="0" y="0"/>
+          <a:ext cx="0" cy="0"/>
+          <a:chOff x="0" y="0"/>
+          <a:chExt cx="0" cy="0"/>
+        </a:xfrm>
+      </p:grpSpPr>
+      <p:sp>
+        <p:nvSpPr>
+          <p:cNvPr id="2" name="Text 0"/>
+          <p:cNvSpPr/>
+          <p:nvPr/>
+        </p:nvSpPr>
+        <p:spPr>
+          <a:xfrm>
+            <a:off x="822960" y="457200"/>
+            <a:ext cx="6400800" cy="274320"/>
+          </a:xfrm>
+          <a:prstGeom prst="rect">
+            <a:avLst/>
+          </a:prstGeom>
+          <a:noFill/>
+          <a:ln/>
+        </p:spPr>
+        <p:txBody>
+          <a:bodyPr wrap="square" lIns="0" tIns="0" rIns="0" bIns="0" rtlCol="0" anchor="ctr"/>
+          <a:lstStyle/>
+          <a:p>
+            <a:pPr algn="l" indent="0" marL="0">
+              <a:buNone/>
+            </a:pPr>
+            <a:r>
+              <a:rPr lang="en-US" sz="1100" b="1" spc="250" kern="0" dirty="0">
+                <a:solidFill>
+                  <a:srgbClr val="4A6B5D"/>
+                </a:solidFill>
+                <a:latin typeface="Arial" pitchFamily="34" charset="0"/>
+                <a:ea typeface="Arial" pitchFamily="34" charset="-122"/>
+                <a:cs typeface="Arial" pitchFamily="34" charset="-120"/>
+              </a:rPr>
+              <a:t>THE PRODUCTION DIARIES PAY OUT</a:t>
+            </a:r>
+            <a:endParaRPr lang="en-US" sz="1100" dirty="0"/>
+          </a:p>
+        </p:txBody>
+      </p:sp>
+      <p:sp>
+        <p:nvSpPr>
+          <p:cNvPr id="3" name="Text 1"/>
+          <p:cNvSpPr/>
+          <p:nvPr/>
+        </p:nvSpPr>
+        <p:spPr>
+          <a:xfrm>
+            <a:off x="6793992" y="457200"/>
+            <a:ext cx="4572000" cy="274320"/>
+          </a:xfrm>
+          <a:prstGeom prst="rect">
+            <a:avLst/>
+          </a:prstGeom>
+          <a:noFill/>
+          <a:ln/>
+        </p:spPr>
+        <p:txBody>
+          <a:bodyPr wrap="square" lIns="0" tIns="0" rIns="0" bIns="0" rtlCol="0" anchor="ctr"/>
+          <a:lstStyle/>
+          <a:p>
+            <a:pPr algn="r" indent="0" marL="0">
+              <a:buNone/>
+            </a:pPr>
+            <a:r>
+              <a:rPr lang="en-US" sz="1100" b="1" spc="250" kern="0" dirty="0">
+                <a:solidFill>
+                  <a:srgbClr val="7A7F72"/>
+                </a:solidFill>
+                <a:latin typeface="Arial" pitchFamily="34" charset="0"/>
+                <a:ea typeface="Arial" pitchFamily="34" charset="-122"/>
+                <a:cs typeface="Arial" pitchFamily="34" charset="-120"/>
+              </a:rPr>
+              <a:t>ISSUED AT THE L07 LOCK, HARVESTED NOW</a:t>
+            </a:r>
+            <a:endParaRPr lang="en-US" sz="1100" dirty="0"/>
+          </a:p>
+        </p:txBody>
+      </p:sp>
+      <p:sp>
+        <p:nvSpPr>
+          <p:cNvPr id="4" name="Shape 2"/>
+          <p:cNvSpPr/>
+          <p:nvPr/>
+        </p:nvSpPr>
+        <p:spPr>
+          <a:xfrm>
+            <a:off x="822960" y="786384"/>
+            <a:ext cx="10543032" cy="0"/>
+          </a:xfrm>
+          <a:prstGeom prst="line">
+            <a:avLst/>
+          </a:prstGeom>
+          <a:noFill/>
+          <a:ln w="9525">
+            <a:solidFill>
+              <a:srgbClr val="D9D4C4"/>
+            </a:solidFill>
+            <a:prstDash val="solid"/>
+          </a:ln>
+        </p:spPr>
+      </p:sp>
+      <p:sp>
+        <p:nvSpPr>
+          <p:cNvPr id="5" name="Text 3"/>
+          <p:cNvSpPr/>
+          <p:nvPr/>
+        </p:nvSpPr>
+        <p:spPr>
+          <a:xfrm>
+            <a:off x="822960" y="1005840"/>
+            <a:ext cx="6309360" cy="731520"/>
+          </a:xfrm>
+          <a:prstGeom prst="rect">
+            <a:avLst/>
+          </a:prstGeom>
+          <a:noFill/>
+          <a:ln/>
+        </p:spPr>
+        <p:txBody>
+          <a:bodyPr wrap="square" lIns="0" tIns="0" rIns="0" bIns="0" rtlCol="0" anchor="ctr"/>
+          <a:lstStyle/>
+          <a:p>
+            <a:pPr indent="0" marL="0">
+              <a:buNone/>
+            </a:pPr>
+            <a:r>
+              <a:rPr lang="en-US" sz="3000" dirty="0">
+                <a:solidFill>
+                  <a:srgbClr val="24313F"/>
+                </a:solidFill>
+                <a:latin typeface="Georgia" pitchFamily="34" charset="0"/>
+                <a:ea typeface="Georgia" pitchFamily="34" charset="-122"/>
+                <a:cs typeface="Georgia" pitchFamily="34" charset="-120"/>
+              </a:rPr>
+              <a:t>A ready-made reflection bank</a:t>
+            </a:r>
+            <a:endParaRPr lang="en-US" sz="3000" dirty="0"/>
+          </a:p>
+        </p:txBody>
+      </p:sp>
+      <p:sp>
+        <p:nvSpPr>
+          <p:cNvPr id="6" name="Shape 4"/>
+          <p:cNvSpPr/>
+          <p:nvPr/>
+        </p:nvSpPr>
+        <p:spPr>
+          <a:xfrm>
+            <a:off x="822960" y="1920240"/>
+            <a:ext cx="914400" cy="0"/>
+          </a:xfrm>
+          <a:prstGeom prst="line">
+            <a:avLst/>
+          </a:prstGeom>
+          <a:noFill/>
+          <a:ln w="31750">
+            <a:solidFill>
+              <a:srgbClr val="8C3A38"/>
+            </a:solidFill>
+            <a:prstDash val="solid"/>
+          </a:ln>
+        </p:spPr>
+      </p:sp>
+      <p:sp>
+        <p:nvSpPr>
+          <p:cNvPr id="7" name="Text 5"/>
+          <p:cNvSpPr/>
+          <p:nvPr/>
+        </p:nvSpPr>
+        <p:spPr>
+          <a:xfrm>
+            <a:off x="822960" y="2148840"/>
+            <a:ext cx="6309360" cy="2286000"/>
+          </a:xfrm>
+          <a:prstGeom prst="rect">
+            <a:avLst/>
+          </a:prstGeom>
+          <a:noFill/>
+          <a:ln/>
+        </p:spPr>
+        <p:txBody>
+          <a:bodyPr wrap="square" lIns="0" tIns="0" rIns="0" bIns="0" rtlCol="0" anchor="t"/>
+          <a:lstStyle/>
+          <a:p>
+            <a:pPr indent="0" marL="0">
+              <a:lnSpc>
+                <a:spcPts val="2400"/>
+              </a:lnSpc>
+              <a:buNone/>
+            </a:pPr>
+            <a:r>
+              <a:rPr lang="en-US" sz="1650" dirty="0">
+                <a:solidFill>
+                  <a:srgbClr val="24313F"/>
+                </a:solidFill>
+                <a:latin typeface="Georgia" pitchFamily="34" charset="0"/>
+                <a:ea typeface="Georgia" pitchFamily="34" charset="-122"/>
+                <a:cs typeface="Georgia" pitchFamily="34" charset="-120"/>
+              </a:rPr>
+              <a:t>Open the WS 6.4 diaries next to the drafts. Every entry in the decisions and consequences columns is already a reflection sentence: decided X because Y, consequence Z. This is why the lock's rule was documented decisions, not silent swaps. Transcribe the three best into the drafts.</a:t>
+            </a:r>
+            <a:endParaRPr lang="en-US" sz="1650" dirty="0"/>
+          </a:p>
+        </p:txBody>
+      </p:sp>
+      <p:sp>
+        <p:nvSpPr>
+          <p:cNvPr id="8" name="Shape 6"/>
+          <p:cNvSpPr/>
+          <p:nvPr/>
+        </p:nvSpPr>
+        <p:spPr>
+          <a:xfrm>
+            <a:off x="822960" y="4617720"/>
+            <a:ext cx="6309360" cy="777240"/>
+          </a:xfrm>
+          <a:prstGeom prst="rect">
+            <a:avLst/>
+          </a:prstGeom>
+          <a:solidFill>
+            <a:srgbClr val="E8EFE7"/>
+          </a:solidFill>
+          <a:ln/>
+        </p:spPr>
+      </p:sp>
+      <p:sp>
+        <p:nvSpPr>
+          <p:cNvPr id="9" name="Text 7"/>
+          <p:cNvSpPr/>
+          <p:nvPr/>
+        </p:nvSpPr>
+        <p:spPr>
+          <a:xfrm>
+            <a:off x="1051560" y="4617720"/>
+            <a:ext cx="5852160" cy="777240"/>
+          </a:xfrm>
+          <a:prstGeom prst="rect">
+            <a:avLst/>
+          </a:prstGeom>
+          <a:noFill/>
+          <a:ln/>
+        </p:spPr>
+        <p:txBody>
+          <a:bodyPr wrap="square" lIns="0" tIns="0" rIns="0" bIns="0" rtlCol="0" anchor="ctr"/>
+          <a:lstStyle/>
+          <a:p>
+            <a:pPr indent="0" marL="0">
+              <a:buNone/>
+            </a:pPr>
+            <a:r>
+              <a:rPr lang="en-US" sz="1700" i="1" dirty="0">
+                <a:solidFill>
+                  <a:srgbClr val="4A6B5D"/>
+                </a:solidFill>
+                <a:latin typeface="Georgia" pitchFamily="34" charset="0"/>
+                <a:ea typeface="Georgia" pitchFamily="34" charset="-122"/>
+                <a:cs typeface="Georgia" pitchFamily="34" charset="-120"/>
+              </a:rPr>
+              <a:t>Decided X, because Y. Consequence: Z.</a:t>
+            </a:r>
+            <a:endParaRPr lang="en-US" sz="1700" dirty="0"/>
+          </a:p>
+        </p:txBody>
+      </p:sp>
+      <p:sp>
+        <p:nvSpPr>
+          <p:cNvPr id="10" name="Shape 8"/>
+          <p:cNvSpPr/>
+          <p:nvPr/>
+        </p:nvSpPr>
+        <p:spPr>
+          <a:xfrm>
+            <a:off x="7452360" y="1097280"/>
+            <a:ext cx="3931920" cy="4480560"/>
+          </a:xfrm>
+          <a:prstGeom prst="rect">
+            <a:avLst/>
+          </a:prstGeom>
+          <a:solidFill>
+            <a:srgbClr val="FAF8F1"/>
+          </a:solidFill>
+          <a:ln w="9525">
+            <a:solidFill>
+              <a:srgbClr val="D9D4C4"/>
+            </a:solidFill>
+            <a:prstDash val="solid"/>
+          </a:ln>
+        </p:spPr>
+      </p:sp>
+      <p:pic>
+        <p:nvPicPr>
+          <p:cNvPr id="11" name="Image 0" descr="/Users/dogan/Documents/Vaults/Courses/wiki/classes/media-studies/decks/_build/img/ws64.jpg">    </p:cNvPr>
+          <p:cNvPicPr>
+            <a:picLocks noChangeAspect="1"/>
+          </p:cNvPicPr>
+          <p:nvPr/>
+        </p:nvPicPr>
+        <p:blipFill>
+          <a:blip r:embed="rId1"/>
+          <a:stretch>
+            <a:fillRect/>
+          </a:stretch>
+        </p:blipFill>
+        <p:spPr>
+          <a:xfrm>
+            <a:off x="7925557" y="1225296"/>
+            <a:ext cx="2985526" cy="4224528"/>
+          </a:xfrm>
+          <a:prstGeom prst="rect">
+            <a:avLst/>
+          </a:prstGeom>
+        </p:spPr>
+      </p:pic>
+      <p:sp>
+        <p:nvSpPr>
+          <p:cNvPr id="12" name="Text 9"/>
+          <p:cNvSpPr/>
+          <p:nvPr/>
+        </p:nvSpPr>
+        <p:spPr>
+          <a:xfrm>
+            <a:off x="7452360" y="5596128"/>
+            <a:ext cx="3931920" cy="274320"/>
+          </a:xfrm>
+          <a:prstGeom prst="rect">
+            <a:avLst/>
+          </a:prstGeom>
+          <a:noFill/>
+          <a:ln/>
+        </p:spPr>
+        <p:txBody>
+          <a:bodyPr wrap="square" lIns="0" tIns="0" rIns="0" bIns="0" rtlCol="0" anchor="ctr"/>
+          <a:lstStyle/>
+          <a:p>
+            <a:pPr algn="ctr" indent="0" marL="0">
+              <a:buNone/>
+            </a:pPr>
+            <a:r>
+              <a:rPr lang="en-US" sz="1000" dirty="0">
+                <a:solidFill>
+                  <a:srgbClr val="7A7F72"/>
+                </a:solidFill>
+                <a:latin typeface="Arial" pitchFamily="34" charset="0"/>
+                <a:ea typeface="Arial" pitchFamily="34" charset="-122"/>
+                <a:cs typeface="Arial" pitchFamily="34" charset="-120"/>
+              </a:rPr>
+              <a:t>WS 6.4: the diary's own columns, on screen</a:t>
+            </a:r>
+            <a:endParaRPr lang="en-US" sz="1000" dirty="0"/>
+          </a:p>
+        </p:txBody>
+      </p:sp>
+      <p:sp>
+        <p:nvSpPr>
+          <p:cNvPr id="13" name="Shape 10"/>
+          <p:cNvSpPr/>
+          <p:nvPr/>
+        </p:nvSpPr>
+        <p:spPr>
+          <a:xfrm>
+            <a:off x="822960" y="6382512"/>
+            <a:ext cx="10543032" cy="0"/>
+          </a:xfrm>
+          <a:prstGeom prst="line">
+            <a:avLst/>
+          </a:prstGeom>
+          <a:noFill/>
+          <a:ln w="9525">
+            <a:solidFill>
+              <a:srgbClr val="D9D4C4"/>
+            </a:solidFill>
+            <a:prstDash val="solid"/>
+          </a:ln>
+        </p:spPr>
+      </p:sp>
+      <p:sp>
+        <p:nvSpPr>
+          <p:cNvPr id="14" name="Text 11"/>
+          <p:cNvSpPr/>
+          <p:nvPr/>
+        </p:nvSpPr>
+        <p:spPr>
+          <a:xfrm>
+            <a:off x="822960" y="6419088"/>
+            <a:ext cx="7315200" cy="274320"/>
+          </a:xfrm>
+          <a:prstGeom prst="rect">
+            <a:avLst/>
+          </a:prstGeom>
+          <a:noFill/>
+          <a:ln/>
+        </p:spPr>
+        <p:txBody>
+          <a:bodyPr wrap="square" lIns="0" tIns="0" rIns="0" bIns="0" rtlCol="0" anchor="ctr"/>
+          <a:lstStyle/>
+          <a:p>
+            <a:pPr indent="0" marL="0">
+              <a:buNone/>
+            </a:pPr>
+            <a:r>
+              <a:rPr lang="en-US" sz="900" spc="150" kern="0" dirty="0">
+                <a:solidFill>
+                  <a:srgbClr val="7A7F72"/>
+                </a:solidFill>
+                <a:latin typeface="Arial" pitchFamily="34" charset="0"/>
+                <a:ea typeface="Arial" pitchFamily="34" charset="-122"/>
+                <a:cs typeface="Arial" pitchFamily="34" charset="-120"/>
+              </a:rPr>
+              <a:t>MEDIA STUDIES 9607 · SEMESTER I</a:t>
+            </a:r>
+            <a:endParaRPr lang="en-US" sz="900" dirty="0"/>
+          </a:p>
+        </p:txBody>
+      </p:sp>
+      <p:sp>
+        <p:nvSpPr>
+          <p:cNvPr id="15" name="Text 12"/>
+          <p:cNvSpPr/>
+          <p:nvPr/>
+        </p:nvSpPr>
+        <p:spPr>
+          <a:xfrm>
+            <a:off x="10268712" y="6355080"/>
+            <a:ext cx="1097280" cy="365760"/>
+          </a:xfrm>
+          <a:prstGeom prst="rect">
+            <a:avLst/>
+          </a:prstGeom>
+          <a:noFill/>
+          <a:ln/>
+        </p:spPr>
+        <p:txBody>
+          <a:bodyPr wrap="square" lIns="0" tIns="0" rIns="0" bIns="0" rtlCol="0" anchor="ctr"/>
+          <a:lstStyle/>
+          <a:p>
+            <a:pPr algn="r" indent="0" marL="0">
+              <a:buNone/>
+            </a:pPr>
+            <a:r>
+              <a:rPr lang="en-US" sz="1600" dirty="0">
+                <a:solidFill>
+                  <a:srgbClr val="A3C1AD"/>
+                </a:solidFill>
+                <a:latin typeface="Georgia" pitchFamily="34" charset="0"/>
+                <a:ea typeface="Georgia" pitchFamily="34" charset="-122"/>
+                <a:cs typeface="Georgia" pitchFamily="34" charset="-120"/>
+              </a:rPr>
+              <a:t>04</a:t>
+            </a:r>
+            <a:endParaRPr lang="en-US" sz="1600" dirty="0"/>
+          </a:p>
+        </p:txBody>
+      </p:sp>
+    </p:spTree>
+  </p:cSld>
+  <p:clrMapOvr>
+    <a:masterClrMapping/>
+  </p:clrMapOvr>
+</p:sld>
+</file>
+
+<file path=ppt/slides/slide9.xml><?xml version="1.0" encoding="utf-8"?>
+<p:sld xmlns:a="http://schemas.openxmlformats.org/drawingml/2006/main" xmlns:r="http://schemas.openxmlformats.org/officeDocument/2006/relationships" xmlns:p="http://schemas.openxmlformats.org/presentationml/2006/main">
+  <p:cSld name="Slide 9">
     <p:bg>
       <p:bgPr>
         <a:solidFill>
@@ -5091,608 +7367,6 @@
               <a:t>Robert Burns, To a Louse, 1786   ·   to see ourselves as others see us</a:t>
             </a:r>
             <a:endParaRPr lang="en-US" sz="1400" dirty="0"/>
-          </a:p>
-        </p:txBody>
-      </p:sp>
-    </p:spTree>
-  </p:cSld>
-  <p:clrMapOvr>
-    <a:masterClrMapping/>
-  </p:clrMapOvr>
-</p:sld>
-</file>
-
-<file path=ppt/slides/slide9.xml><?xml version="1.0" encoding="utf-8"?>
-<p:sld xmlns:a="http://schemas.openxmlformats.org/drawingml/2006/main" xmlns:r="http://schemas.openxmlformats.org/officeDocument/2006/relationships" xmlns:p="http://schemas.openxmlformats.org/presentationml/2006/main">
-  <p:cSld name="Slide 9">
-    <p:bg>
-      <p:bgPr>
-        <a:solidFill>
-          <a:srgbClr val="FAF8F1"/>
-        </a:solidFill>
-      </p:bgPr>
-    </p:bg>
-    <p:spTree>
-      <p:nvGrpSpPr>
-        <p:cNvPr id="1" name=""/>
-        <p:cNvGrpSpPr/>
-        <p:nvPr/>
-      </p:nvGrpSpPr>
-      <p:grpSpPr>
-        <a:xfrm>
-          <a:off x="0" y="0"/>
-          <a:ext cx="0" cy="0"/>
-          <a:chOff x="0" y="0"/>
-          <a:chExt cx="0" cy="0"/>
-        </a:xfrm>
-      </p:grpSpPr>
-      <p:sp>
-        <p:nvSpPr>
-          <p:cNvPr id="2" name="Text 0"/>
-          <p:cNvSpPr/>
-          <p:nvPr/>
-        </p:nvSpPr>
-        <p:spPr>
-          <a:xfrm>
-            <a:off x="822960" y="457200"/>
-            <a:ext cx="6400800" cy="274320"/>
-          </a:xfrm>
-          <a:prstGeom prst="rect">
-            <a:avLst/>
-          </a:prstGeom>
-          <a:noFill/>
-          <a:ln/>
-        </p:spPr>
-        <p:txBody>
-          <a:bodyPr wrap="square" lIns="0" tIns="0" rIns="0" bIns="0" rtlCol="0" anchor="ctr"/>
-          <a:lstStyle/>
-          <a:p>
-            <a:pPr algn="l" indent="0" marL="0">
-              <a:buNone/>
-            </a:pPr>
-            <a:r>
-              <a:rPr lang="en-US" sz="1100" b="1" spc="250" kern="0" dirty="0">
-                <a:solidFill>
-                  <a:srgbClr val="4A6B5D"/>
-                </a:solidFill>
-                <a:latin typeface="Arial" pitchFamily="34" charset="0"/>
-                <a:ea typeface="Arial" pitchFamily="34" charset="-122"/>
-                <a:cs typeface="Arial" pitchFamily="34" charset="-120"/>
-              </a:rPr>
-              <a:t>SENTENCE SURGERY</a:t>
-            </a:r>
-            <a:endParaRPr lang="en-US" sz="1100" dirty="0"/>
-          </a:p>
-        </p:txBody>
-      </p:sp>
-      <p:sp>
-        <p:nvSpPr>
-          <p:cNvPr id="3" name="Text 1"/>
-          <p:cNvSpPr/>
-          <p:nvPr/>
-        </p:nvSpPr>
-        <p:spPr>
-          <a:xfrm>
-            <a:off x="6793992" y="457200"/>
-            <a:ext cx="4572000" cy="274320"/>
-          </a:xfrm>
-          <a:prstGeom prst="rect">
-            <a:avLst/>
-          </a:prstGeom>
-          <a:noFill/>
-          <a:ln/>
-        </p:spPr>
-        <p:txBody>
-          <a:bodyPr wrap="square" lIns="0" tIns="0" rIns="0" bIns="0" rtlCol="0" anchor="ctr"/>
-          <a:lstStyle/>
-          <a:p>
-            <a:pPr algn="r" indent="0" marL="0">
-              <a:buNone/>
-            </a:pPr>
-            <a:r>
-              <a:rPr lang="en-US" sz="1100" b="1" spc="250" kern="0" dirty="0">
-                <a:solidFill>
-                  <a:srgbClr val="7A7F72"/>
-                </a:solidFill>
-                <a:latin typeface="Arial" pitchFamily="34" charset="0"/>
-                <a:ea typeface="Arial" pitchFamily="34" charset="-122"/>
-                <a:cs typeface="Arial" pitchFamily="34" charset="-120"/>
-              </a:rPr>
-              <a:t>RUN THE TEST ON YOUR OWN DRAFT</a:t>
-            </a:r>
-            <a:endParaRPr lang="en-US" sz="1100" dirty="0"/>
-          </a:p>
-        </p:txBody>
-      </p:sp>
-      <p:sp>
-        <p:nvSpPr>
-          <p:cNvPr id="4" name="Shape 2"/>
-          <p:cNvSpPr/>
-          <p:nvPr/>
-        </p:nvSpPr>
-        <p:spPr>
-          <a:xfrm>
-            <a:off x="822960" y="786384"/>
-            <a:ext cx="10543032" cy="0"/>
-          </a:xfrm>
-          <a:prstGeom prst="line">
-            <a:avLst/>
-          </a:prstGeom>
-          <a:noFill/>
-          <a:ln w="9525">
-            <a:solidFill>
-              <a:srgbClr val="D9D4C4"/>
-            </a:solidFill>
-            <a:prstDash val="solid"/>
-          </a:ln>
-        </p:spPr>
-      </p:sp>
-      <p:sp>
-        <p:nvSpPr>
-          <p:cNvPr id="5" name="Text 3"/>
-          <p:cNvSpPr/>
-          <p:nvPr/>
-        </p:nvSpPr>
-        <p:spPr>
-          <a:xfrm>
-            <a:off x="822960" y="1005840"/>
-            <a:ext cx="10543032" cy="731520"/>
-          </a:xfrm>
-          <a:prstGeom prst="rect">
-            <a:avLst/>
-          </a:prstGeom>
-          <a:noFill/>
-          <a:ln/>
-        </p:spPr>
-        <p:txBody>
-          <a:bodyPr wrap="square" lIns="0" tIns="0" rIns="0" bIns="0" rtlCol="0" anchor="ctr"/>
-          <a:lstStyle/>
-          <a:p>
-            <a:pPr indent="0" marL="0">
-              <a:buNone/>
-            </a:pPr>
-            <a:r>
-              <a:rPr lang="en-US" sz="3400" dirty="0">
-                <a:solidFill>
-                  <a:srgbClr val="24313F"/>
-                </a:solidFill>
-                <a:latin typeface="Georgia" pitchFamily="34" charset="0"/>
-                <a:ea typeface="Georgia" pitchFamily="34" charset="-122"/>
-                <a:cs typeface="Georgia" pitchFamily="34" charset="-120"/>
-              </a:rPr>
-              <a:t>One sentence, operated on</a:t>
-            </a:r>
-            <a:endParaRPr lang="en-US" sz="3400" dirty="0"/>
-          </a:p>
-        </p:txBody>
-      </p:sp>
-      <p:sp>
-        <p:nvSpPr>
-          <p:cNvPr id="6" name="Text 4"/>
-          <p:cNvSpPr/>
-          <p:nvPr/>
-        </p:nvSpPr>
-        <p:spPr>
-          <a:xfrm>
-            <a:off x="822960" y="1965960"/>
-            <a:ext cx="4846320" cy="365760"/>
-          </a:xfrm>
-          <a:prstGeom prst="rect">
-            <a:avLst/>
-          </a:prstGeom>
-          <a:noFill/>
-          <a:ln/>
-        </p:spPr>
-        <p:txBody>
-          <a:bodyPr wrap="square" lIns="0" tIns="0" rIns="0" bIns="0" rtlCol="0" anchor="ctr"/>
-          <a:lstStyle/>
-          <a:p>
-            <a:pPr indent="0" marL="0">
-              <a:buNone/>
-            </a:pPr>
-            <a:r>
-              <a:rPr lang="en-US" sz="1100" b="1" spc="150" kern="0" dirty="0">
-                <a:solidFill>
-                  <a:srgbClr val="7A7F72"/>
-                </a:solidFill>
-                <a:latin typeface="Arial" pitchFamily="34" charset="0"/>
-                <a:ea typeface="Arial" pitchFamily="34" charset="-122"/>
-                <a:cs typeface="Arial" pitchFamily="34" charset="-120"/>
-              </a:rPr>
-              <a:t>BEFORE  ·  describes</a:t>
-            </a:r>
-            <a:endParaRPr lang="en-US" sz="1100" dirty="0"/>
-          </a:p>
-        </p:txBody>
-      </p:sp>
-      <p:sp>
-        <p:nvSpPr>
-          <p:cNvPr id="7" name="Shape 5"/>
-          <p:cNvSpPr/>
-          <p:nvPr/>
-        </p:nvSpPr>
-        <p:spPr>
-          <a:xfrm>
-            <a:off x="822960" y="2331720"/>
-            <a:ext cx="4846320" cy="1554480"/>
-          </a:xfrm>
-          <a:prstGeom prst="rect">
-            <a:avLst/>
-          </a:prstGeom>
-          <a:solidFill>
-            <a:srgbClr val="FAF8F1"/>
-          </a:solidFill>
-          <a:ln w="12700">
-            <a:solidFill>
-              <a:srgbClr val="D9D4C4"/>
-            </a:solidFill>
-            <a:prstDash val="solid"/>
-          </a:ln>
-        </p:spPr>
-      </p:sp>
-      <p:sp>
-        <p:nvSpPr>
-          <p:cNvPr id="8" name="Text 6"/>
-          <p:cNvSpPr/>
-          <p:nvPr/>
-        </p:nvSpPr>
-        <p:spPr>
-          <a:xfrm>
-            <a:off x="1051560" y="2468880"/>
-            <a:ext cx="4389120" cy="1280160"/>
-          </a:xfrm>
-          <a:prstGeom prst="rect">
-            <a:avLst/>
-          </a:prstGeom>
-          <a:noFill/>
-          <a:ln/>
-        </p:spPr>
-        <p:txBody>
-          <a:bodyPr wrap="square" lIns="0" tIns="0" rIns="0" bIns="0" rtlCol="0" anchor="t"/>
-          <a:lstStyle/>
-          <a:p>
-            <a:pPr indent="0" marL="0">
-              <a:lnSpc>
-                <a:spcPts val="2300"/>
-              </a:lnSpc>
-              <a:buNone/>
-            </a:pPr>
-            <a:r>
-              <a:rPr lang="en-US" sz="1700" dirty="0">
-                <a:solidFill>
-                  <a:srgbClr val="7A7F72"/>
-                </a:solidFill>
-                <a:latin typeface="Georgia" pitchFamily="34" charset="0"/>
-                <a:ea typeface="Georgia" pitchFamily="34" charset="-122"/>
-                <a:cs typeface="Georgia" pitchFamily="34" charset="-120"/>
-              </a:rPr>
-              <a:t>We filmed the scene in the car park and then edited it together.</a:t>
-            </a:r>
-            <a:endParaRPr lang="en-US" sz="1700" dirty="0"/>
-          </a:p>
-        </p:txBody>
-      </p:sp>
-      <p:sp>
-        <p:nvSpPr>
-          <p:cNvPr id="9" name="Text 7"/>
-          <p:cNvSpPr/>
-          <p:nvPr/>
-        </p:nvSpPr>
-        <p:spPr>
-          <a:xfrm>
-            <a:off x="5760720" y="2651760"/>
-            <a:ext cx="548640" cy="914400"/>
-          </a:xfrm>
-          <a:prstGeom prst="rect">
-            <a:avLst/>
-          </a:prstGeom>
-          <a:noFill/>
-          <a:ln/>
-        </p:spPr>
-        <p:txBody>
-          <a:bodyPr wrap="square" lIns="0" tIns="0" rIns="0" bIns="0" rtlCol="0" anchor="ctr"/>
-          <a:lstStyle/>
-          <a:p>
-            <a:pPr algn="ctr" indent="0" marL="0">
-              <a:buNone/>
-            </a:pPr>
-            <a:r>
-              <a:rPr lang="en-US" sz="3400" dirty="0">
-                <a:solidFill>
-                  <a:srgbClr val="A3C1AD"/>
-                </a:solidFill>
-                <a:latin typeface="Georgia" pitchFamily="34" charset="0"/>
-                <a:ea typeface="Georgia" pitchFamily="34" charset="-122"/>
-                <a:cs typeface="Georgia" pitchFamily="34" charset="-120"/>
-              </a:rPr>
-              <a:t>→</a:t>
-            </a:r>
-            <a:endParaRPr lang="en-US" sz="3400" dirty="0"/>
-          </a:p>
-        </p:txBody>
-      </p:sp>
-      <p:sp>
-        <p:nvSpPr>
-          <p:cNvPr id="10" name="Text 8"/>
-          <p:cNvSpPr/>
-          <p:nvPr/>
-        </p:nvSpPr>
-        <p:spPr>
-          <a:xfrm>
-            <a:off x="6492240" y="1965960"/>
-            <a:ext cx="4846320" cy="365760"/>
-          </a:xfrm>
-          <a:prstGeom prst="rect">
-            <a:avLst/>
-          </a:prstGeom>
-          <a:noFill/>
-          <a:ln/>
-        </p:spPr>
-        <p:txBody>
-          <a:bodyPr wrap="square" lIns="0" tIns="0" rIns="0" bIns="0" rtlCol="0" anchor="ctr"/>
-          <a:lstStyle/>
-          <a:p>
-            <a:pPr indent="0" marL="0">
-              <a:buNone/>
-            </a:pPr>
-            <a:r>
-              <a:rPr lang="en-US" sz="1100" b="1" spc="150" kern="0" dirty="0">
-                <a:solidFill>
-                  <a:srgbClr val="4A6B5D"/>
-                </a:solidFill>
-                <a:latin typeface="Arial" pitchFamily="34" charset="0"/>
-                <a:ea typeface="Arial" pitchFamily="34" charset="-122"/>
-                <a:cs typeface="Arial" pitchFamily="34" charset="-120"/>
-              </a:rPr>
-              <a:t>AFTER  ·  reflects</a:t>
-            </a:r>
-            <a:endParaRPr lang="en-US" sz="1100" dirty="0"/>
-          </a:p>
-        </p:txBody>
-      </p:sp>
-      <p:sp>
-        <p:nvSpPr>
-          <p:cNvPr id="11" name="Shape 9"/>
-          <p:cNvSpPr/>
-          <p:nvPr/>
-        </p:nvSpPr>
-        <p:spPr>
-          <a:xfrm>
-            <a:off x="6492240" y="2331720"/>
-            <a:ext cx="4846320" cy="1554480"/>
-          </a:xfrm>
-          <a:prstGeom prst="rect">
-            <a:avLst/>
-          </a:prstGeom>
-          <a:solidFill>
-            <a:srgbClr val="E8EFE7"/>
-          </a:solidFill>
-          <a:ln w="12700">
-            <a:solidFill>
-              <a:srgbClr val="8AA394"/>
-            </a:solidFill>
-            <a:prstDash val="solid"/>
-          </a:ln>
-        </p:spPr>
-      </p:sp>
-      <p:sp>
-        <p:nvSpPr>
-          <p:cNvPr id="12" name="Text 10"/>
-          <p:cNvSpPr/>
-          <p:nvPr/>
-        </p:nvSpPr>
-        <p:spPr>
-          <a:xfrm>
-            <a:off x="6720840" y="2450592"/>
-            <a:ext cx="4434840" cy="1371600"/>
-          </a:xfrm>
-          <a:prstGeom prst="rect">
-            <a:avLst/>
-          </a:prstGeom>
-          <a:noFill/>
-          <a:ln/>
-        </p:spPr>
-        <p:txBody>
-          <a:bodyPr wrap="square" lIns="0" tIns="0" rIns="0" bIns="0" rtlCol="0" anchor="t"/>
-          <a:lstStyle/>
-          <a:p>
-            <a:pPr indent="0" marL="0">
-              <a:lnSpc>
-                <a:spcPts val="2000"/>
-              </a:lnSpc>
-              <a:buNone/>
-            </a:pPr>
-            <a:r>
-              <a:rPr lang="en-US" sz="1550" dirty="0">
-                <a:solidFill>
-                  <a:srgbClr val="24313F"/>
-                </a:solidFill>
-                <a:latin typeface="Georgia" pitchFamily="34" charset="0"/>
-                <a:ea typeface="Georgia" pitchFamily="34" charset="-122"/>
-                <a:cs typeface="Georgia" pitchFamily="34" charset="-120"/>
-              </a:rPr>
-              <a:t>We chose the car park because it was the only free location, and the flat light shows in the grade; next time we would scout for contrast.</a:t>
-            </a:r>
-            <a:endParaRPr lang="en-US" sz="1550" dirty="0"/>
-          </a:p>
-        </p:txBody>
-      </p:sp>
-      <p:sp>
-        <p:nvSpPr>
-          <p:cNvPr id="13" name="Text 11"/>
-          <p:cNvSpPr/>
-          <p:nvPr/>
-        </p:nvSpPr>
-        <p:spPr>
-          <a:xfrm>
-            <a:off x="822960" y="4297680"/>
-            <a:ext cx="10543032" cy="457200"/>
-          </a:xfrm>
-          <a:prstGeom prst="rect">
-            <a:avLst/>
-          </a:prstGeom>
-          <a:noFill/>
-          <a:ln/>
-        </p:spPr>
-        <p:txBody>
-          <a:bodyPr wrap="square" lIns="0" tIns="0" rIns="0" bIns="0" rtlCol="0" anchor="ctr"/>
-          <a:lstStyle/>
-          <a:p>
-            <a:pPr indent="0" marL="0">
-              <a:buNone/>
-            </a:pPr>
-            <a:r>
-              <a:rPr lang="en-US" sz="1700" i="1" dirty="0">
-                <a:solidFill>
-                  <a:srgbClr val="4A6B5D"/>
-                </a:solidFill>
-                <a:latin typeface="Georgia" pitchFamily="34" charset="0"/>
-                <a:ea typeface="Georgia" pitchFamily="34" charset="-122"/>
-                <a:cs typeface="Georgia" pitchFamily="34" charset="-120"/>
-              </a:rPr>
-              <a:t>Same event. One names a decision, a reason, and a change. That is the whole surgery.</a:t>
-            </a:r>
-            <a:endParaRPr lang="en-US" sz="1700" dirty="0"/>
-          </a:p>
-        </p:txBody>
-      </p:sp>
-      <p:sp>
-        <p:nvSpPr>
-          <p:cNvPr id="14" name="Text 12"/>
-          <p:cNvSpPr/>
-          <p:nvPr/>
-        </p:nvSpPr>
-        <p:spPr>
-          <a:xfrm>
-            <a:off x="822960" y="4892040"/>
-            <a:ext cx="10543032" cy="365760"/>
-          </a:xfrm>
-          <a:prstGeom prst="rect">
-            <a:avLst/>
-          </a:prstGeom>
-          <a:noFill/>
-          <a:ln/>
-        </p:spPr>
-        <p:txBody>
-          <a:bodyPr wrap="square" lIns="0" tIns="0" rIns="0" bIns="0" rtlCol="0" anchor="ctr"/>
-          <a:lstStyle/>
-          <a:p>
-            <a:pPr indent="0" marL="0">
-              <a:buNone/>
-            </a:pPr>
-            <a:r>
-              <a:rPr lang="en-US" sz="1250" i="1" dirty="0">
-                <a:solidFill>
-                  <a:srgbClr val="7A7F72"/>
-                </a:solidFill>
-                <a:latin typeface="Arial" pitchFamily="34" charset="0"/>
-                <a:ea typeface="Arial" pitchFamily="34" charset="-122"/>
-                <a:cs typeface="Arial" pitchFamily="34" charset="-120"/>
-              </a:rPr>
-              <a:t>The surgery closes with format speed-pitches: 60 seconds each in fours, the four votes, format finalized.</a:t>
-            </a:r>
-            <a:endParaRPr lang="en-US" sz="1250" dirty="0"/>
-          </a:p>
-        </p:txBody>
-      </p:sp>
-      <p:sp>
-        <p:nvSpPr>
-          <p:cNvPr id="15" name="Shape 13"/>
-          <p:cNvSpPr/>
-          <p:nvPr/>
-        </p:nvSpPr>
-        <p:spPr>
-          <a:xfrm>
-            <a:off x="822960" y="6382512"/>
-            <a:ext cx="10543032" cy="0"/>
-          </a:xfrm>
-          <a:prstGeom prst="line">
-            <a:avLst/>
-          </a:prstGeom>
-          <a:noFill/>
-          <a:ln w="9525">
-            <a:solidFill>
-              <a:srgbClr val="D9D4C4"/>
-            </a:solidFill>
-            <a:prstDash val="solid"/>
-          </a:ln>
-        </p:spPr>
-      </p:sp>
-      <p:sp>
-        <p:nvSpPr>
-          <p:cNvPr id="16" name="Text 14"/>
-          <p:cNvSpPr/>
-          <p:nvPr/>
-        </p:nvSpPr>
-        <p:spPr>
-          <a:xfrm>
-            <a:off x="822960" y="6419088"/>
-            <a:ext cx="7315200" cy="274320"/>
-          </a:xfrm>
-          <a:prstGeom prst="rect">
-            <a:avLst/>
-          </a:prstGeom>
-          <a:noFill/>
-          <a:ln/>
-        </p:spPr>
-        <p:txBody>
-          <a:bodyPr wrap="square" lIns="0" tIns="0" rIns="0" bIns="0" rtlCol="0" anchor="ctr"/>
-          <a:lstStyle/>
-          <a:p>
-            <a:pPr indent="0" marL="0">
-              <a:buNone/>
-            </a:pPr>
-            <a:r>
-              <a:rPr lang="en-US" sz="900" spc="150" kern="0" dirty="0">
-                <a:solidFill>
-                  <a:srgbClr val="7A7F72"/>
-                </a:solidFill>
-                <a:latin typeface="Arial" pitchFamily="34" charset="0"/>
-                <a:ea typeface="Arial" pitchFamily="34" charset="-122"/>
-                <a:cs typeface="Arial" pitchFamily="34" charset="-120"/>
-              </a:rPr>
-              <a:t>MEDIA STUDIES 9607 · SEMESTER I</a:t>
-            </a:r>
-            <a:endParaRPr lang="en-US" sz="900" dirty="0"/>
-          </a:p>
-        </p:txBody>
-      </p:sp>
-      <p:sp>
-        <p:nvSpPr>
-          <p:cNvPr id="17" name="Text 15"/>
-          <p:cNvSpPr/>
-          <p:nvPr/>
-        </p:nvSpPr>
-        <p:spPr>
-          <a:xfrm>
-            <a:off x="10268712" y="6355080"/>
-            <a:ext cx="1097280" cy="365760"/>
-          </a:xfrm>
-          <a:prstGeom prst="rect">
-            <a:avLst/>
-          </a:prstGeom>
-          <a:noFill/>
-          <a:ln/>
-        </p:spPr>
-        <p:txBody>
-          <a:bodyPr wrap="square" lIns="0" tIns="0" rIns="0" bIns="0" rtlCol="0" anchor="ctr"/>
-          <a:lstStyle/>
-          <a:p>
-            <a:pPr algn="r" indent="0" marL="0">
-              <a:buNone/>
-            </a:pPr>
-            <a:r>
-              <a:rPr lang="en-US" sz="1600" dirty="0">
-                <a:solidFill>
-                  <a:srgbClr val="A3C1AD"/>
-                </a:solidFill>
-                <a:latin typeface="Georgia" pitchFamily="34" charset="0"/>
-                <a:ea typeface="Georgia" pitchFamily="34" charset="-122"/>
-                <a:cs typeface="Georgia" pitchFamily="34" charset="-120"/>
-              </a:rPr>
-              <a:t>04</a:t>
-            </a:r>
-            <a:endParaRPr lang="en-US" sz="1600" dirty="0"/>
           </a:p>
         </p:txBody>
       </p:sp>

--- a/content/decks/media-studies/media-studies-s1-lesson-13-the-creative-critical-reflection.pptx
+++ b/content/decks/media-studies/media-studies-s1-lesson-13-the-creative-critical-reflection.pptx
@@ -2679,7 +2679,7 @@
                 <a:ea typeface="Arial" pitchFamily="34" charset="-122"/>
                 <a:cs typeface="Arial" pitchFamily="34" charset="-120"/>
               </a:rPr>
-              <a:t>The surgery closes with format speed-pitches: 60 seconds each in fours, the four votes, format finalized.</a:t>
+              <a:t>Then format speed-pitches: 60 seconds each, in groups of four. Vote, and the format is final.</a:t>
             </a:r>
             <a:endParaRPr lang="en-US" sz="1250" dirty="0"/>
           </a:p>
@@ -3294,12 +3294,29 @@
           <a:p>
             <a:pPr indent="0" marL="0">
               <a:lnSpc>
-                <a:spcPts val="2300"/>
+                <a:spcPts val="2200"/>
               </a:lnSpc>
               <a:buNone/>
             </a:pPr>
             <a:r>
-              <a:rPr lang="en-US" sz="1650" dirty="0">
+              <a:rPr lang="en-US" sz="1400" b="1" spc="100" kern="0" dirty="0">
+                <a:solidFill>
+                  <a:srgbClr val="4A6B5D"/>
+                </a:solidFill>
+                <a:latin typeface="Arial" pitchFamily="34" charset="0"/>
+                <a:ea typeface="Arial" pitchFamily="34" charset="-122"/>
+                <a:cs typeface="Arial" pitchFamily="34" charset="-120"/>
+              </a:rPr>
+              <a:t>KEY POINT   </a:t>
+            </a:r>
+            <a:pPr indent="0" marL="0">
+              <a:lnSpc>
+                <a:spcPts val="2200"/>
+              </a:lnSpc>
+              <a:buNone/>
+            </a:pPr>
+            <a:r>
+              <a:rPr lang="en-US" sz="1600" dirty="0">
                 <a:solidFill>
                   <a:srgbClr val="24313F"/>
                 </a:solidFill>
@@ -3307,9 +3324,83 @@
                 <a:ea typeface="Georgia" pitchFamily="34" charset="-122"/>
                 <a:cs typeface="Georgia" pitchFamily="34" charset="-120"/>
               </a:rPr>
-              <a:t>Even the near-perfect portfolio lost its CCR strand to the same defect as the weak one: everything in one tool. Presented creatively, using technology is a spread requirement, not a suggestion: the format menu (director's commentary, voiceover presentation, podcast, screencast) exists to be used across more than one application.</a:t>
-            </a:r>
-            <a:endParaRPr lang="en-US" sz="1650" dirty="0"/>
+              <a:t>Even the near-perfect portfolio lost its CCR marks the same way: everything in one tool.</a:t>
+            </a:r>
+            <a:endParaRPr lang="en-US" sz="1400" dirty="0"/>
+          </a:p>
+          <a:p>
+            <a:pPr indent="0" marL="0">
+              <a:lnSpc>
+                <a:spcPts val="2200"/>
+              </a:lnSpc>
+              <a:buNone/>
+            </a:pPr>
+            <a:r>
+              <a:rPr lang="en-US" sz="1400" b="1" spc="100" kern="0" dirty="0">
+                <a:solidFill>
+                  <a:srgbClr val="4A6B5D"/>
+                </a:solidFill>
+                <a:latin typeface="Arial" pitchFamily="34" charset="0"/>
+                <a:ea typeface="Arial" pitchFamily="34" charset="-122"/>
+                <a:cs typeface="Arial" pitchFamily="34" charset="-120"/>
+              </a:rPr>
+              <a:t>RULE   </a:t>
+            </a:r>
+            <a:pPr indent="0" marL="0">
+              <a:lnSpc>
+                <a:spcPts val="2200"/>
+              </a:lnSpc>
+              <a:buNone/>
+            </a:pPr>
+            <a:r>
+              <a:rPr lang="en-US" sz="1600" dirty="0">
+                <a:solidFill>
+                  <a:srgbClr val="24313F"/>
+                </a:solidFill>
+                <a:latin typeface="Georgia" pitchFamily="34" charset="0"/>
+                <a:ea typeface="Georgia" pitchFamily="34" charset="-122"/>
+                <a:cs typeface="Georgia" pitchFamily="34" charset="-120"/>
+              </a:rPr>
+              <a:t>“Presented creatively, using technology” means more than one tool across the four questions.</a:t>
+            </a:r>
+            <a:endParaRPr lang="en-US" sz="1400" dirty="0"/>
+          </a:p>
+          <a:p>
+            <a:pPr indent="0" marL="0">
+              <a:lnSpc>
+                <a:spcPts val="2200"/>
+              </a:lnSpc>
+              <a:buNone/>
+            </a:pPr>
+            <a:r>
+              <a:rPr lang="en-US" sz="1400" b="1" spc="100" kern="0" dirty="0">
+                <a:solidFill>
+                  <a:srgbClr val="4A6B5D"/>
+                </a:solidFill>
+                <a:latin typeface="Arial" pitchFamily="34" charset="0"/>
+                <a:ea typeface="Arial" pitchFamily="34" charset="-122"/>
+                <a:cs typeface="Arial" pitchFamily="34" charset="-120"/>
+              </a:rPr>
+              <a:t>THE MENU   </a:t>
+            </a:r>
+            <a:pPr indent="0" marL="0">
+              <a:lnSpc>
+                <a:spcPts val="2200"/>
+              </a:lnSpc>
+              <a:buNone/>
+            </a:pPr>
+            <a:r>
+              <a:rPr lang="en-US" sz="1600" dirty="0">
+                <a:solidFill>
+                  <a:srgbClr val="24313F"/>
+                </a:solidFill>
+                <a:latin typeface="Georgia" pitchFamily="34" charset="0"/>
+                <a:ea typeface="Georgia" pitchFamily="34" charset="-122"/>
+                <a:cs typeface="Georgia" pitchFamily="34" charset="-120"/>
+              </a:rPr>
+              <a:t>Director's commentary, voiceover presentation, podcast, screencast.</a:t>
+            </a:r>
+            <a:endParaRPr lang="en-US" sz="1400" dirty="0"/>
           </a:p>
         </p:txBody>
       </p:sp>
@@ -3637,6 +3728,23 @@
               <a:buNone/>
             </a:pPr>
             <a:r>
+              <a:rPr lang="en-US" sz="1400" b="1" spc="100" kern="0" dirty="0">
+                <a:solidFill>
+                  <a:srgbClr val="4A6B5D"/>
+                </a:solidFill>
+                <a:latin typeface="Arial" pitchFamily="34" charset="0"/>
+                <a:ea typeface="Arial" pitchFamily="34" charset="-122"/>
+                <a:cs typeface="Arial" pitchFamily="34" charset="-120"/>
+              </a:rPr>
+              <a:t>REVIEW   </a:t>
+            </a:r>
+            <a:pPr indent="0" marL="0">
+              <a:lnSpc>
+                <a:spcPts val="2300"/>
+              </a:lnSpc>
+              <a:buNone/>
+            </a:pPr>
+            <a:r>
               <a:rPr lang="en-US" sz="1600" dirty="0">
                 <a:solidFill>
                   <a:srgbClr val="24313F"/>
@@ -3645,9 +3753,83 @@
                 <a:ea typeface="Georgia" pitchFamily="34" charset="-122"/>
                 <a:cs typeface="Georgia" pitchFamily="34" charset="-120"/>
               </a:rPr>
-              <a:t>Full drafts reviewed by teacher and peers in the C1 criteria's own language: describe, question, suggest. Every draft leaves with a written action list. The format is chosen by Friday from the coursebook menu, and presented creatively using technology is a requirement, not a suggestion.</a:t>
-            </a:r>
-            <a:endParaRPr lang="en-US" sz="1600" dirty="0"/>
+              <a:t>Full drafts reviewed by teacher and peers, in the C1 criteria's own words: describe, question, suggest.</a:t>
+            </a:r>
+            <a:endParaRPr lang="en-US" sz="1400" dirty="0"/>
+          </a:p>
+          <a:p>
+            <a:pPr indent="0" marL="0">
+              <a:lnSpc>
+                <a:spcPts val="2300"/>
+              </a:lnSpc>
+              <a:buNone/>
+            </a:pPr>
+            <a:r>
+              <a:rPr lang="en-US" sz="1400" b="1" spc="100" kern="0" dirty="0">
+                <a:solidFill>
+                  <a:srgbClr val="4A6B5D"/>
+                </a:solidFill>
+                <a:latin typeface="Arial" pitchFamily="34" charset="0"/>
+                <a:ea typeface="Arial" pitchFamily="34" charset="-122"/>
+                <a:cs typeface="Arial" pitchFamily="34" charset="-120"/>
+              </a:rPr>
+              <a:t>LEAVE WITH   </a:t>
+            </a:r>
+            <a:pPr indent="0" marL="0">
+              <a:lnSpc>
+                <a:spcPts val="2300"/>
+              </a:lnSpc>
+              <a:buNone/>
+            </a:pPr>
+            <a:r>
+              <a:rPr lang="en-US" sz="1600" dirty="0">
+                <a:solidFill>
+                  <a:srgbClr val="24313F"/>
+                </a:solidFill>
+                <a:latin typeface="Georgia" pitchFamily="34" charset="0"/>
+                <a:ea typeface="Georgia" pitchFamily="34" charset="-122"/>
+                <a:cs typeface="Georgia" pitchFamily="34" charset="-120"/>
+              </a:rPr>
+              <a:t>A written action list for your draft.</a:t>
+            </a:r>
+            <a:endParaRPr lang="en-US" sz="1400" dirty="0"/>
+          </a:p>
+          <a:p>
+            <a:pPr indent="0" marL="0">
+              <a:lnSpc>
+                <a:spcPts val="2300"/>
+              </a:lnSpc>
+              <a:buNone/>
+            </a:pPr>
+            <a:r>
+              <a:rPr lang="en-US" sz="1400" b="1" spc="100" kern="0" dirty="0">
+                <a:solidFill>
+                  <a:srgbClr val="4A6B5D"/>
+                </a:solidFill>
+                <a:latin typeface="Arial" pitchFamily="34" charset="0"/>
+                <a:ea typeface="Arial" pitchFamily="34" charset="-122"/>
+                <a:cs typeface="Arial" pitchFamily="34" charset="-120"/>
+              </a:rPr>
+              <a:t>BY FRIDAY   </a:t>
+            </a:r>
+            <a:pPr indent="0" marL="0">
+              <a:lnSpc>
+                <a:spcPts val="2300"/>
+              </a:lnSpc>
+              <a:buNone/>
+            </a:pPr>
+            <a:r>
+              <a:rPr lang="en-US" sz="1600" dirty="0">
+                <a:solidFill>
+                  <a:srgbClr val="24313F"/>
+                </a:solidFill>
+                <a:latin typeface="Georgia" pitchFamily="34" charset="0"/>
+                <a:ea typeface="Georgia" pitchFamily="34" charset="-122"/>
+                <a:cs typeface="Georgia" pitchFamily="34" charset="-120"/>
+              </a:rPr>
+              <a:t>Format chosen from the coursebook menu. More than one tool.</a:t>
+            </a:r>
+            <a:endParaRPr lang="en-US" sz="1400" dirty="0"/>
           </a:p>
         </p:txBody>
       </p:sp>
@@ -4851,7 +5033,7 @@
                 <a:ea typeface="Georgia" pitchFamily="34" charset="-122"/>
                 <a:cs typeface="Georgia" pitchFamily="34" charset="-120"/>
               </a:rPr>
-              <a:t>What developed from day-one footage to the rough cut, and what changed it.</a:t>
+              <a:t>How your skills grew from day-one footage to the rough cut, and what changed them.</a:t>
             </a:r>
             <a:endParaRPr lang="en-US" sz="1550" dirty="0"/>
           </a:p>
@@ -4955,7 +5137,7 @@
                 <a:ea typeface="Georgia" pitchFamily="34" charset="-122"/>
                 <a:cs typeface="Georgia" pitchFamily="34" charset="-120"/>
               </a:rPr>
-              <a:t>Software, hardware, online: as decisions, we used X so that Y, not an inventory.</a:t>
+              <a:t>Write technology as decisions: we used X so that Y. Not a list of software.</a:t>
             </a:r>
             <a:endParaRPr lang="en-US" sz="1550" dirty="0"/>
           </a:p>
@@ -6671,12 +6853,29 @@
           <a:p>
             <a:pPr indent="0" marL="0">
               <a:lnSpc>
-                <a:spcPts val="2400"/>
+                <a:spcPts val="2300"/>
               </a:lnSpc>
               <a:buNone/>
             </a:pPr>
             <a:r>
-              <a:rPr lang="en-US" sz="1700" dirty="0">
+              <a:rPr lang="en-US" sz="1400" b="1" spc="100" kern="0" dirty="0">
+                <a:solidFill>
+                  <a:srgbClr val="4A6B5D"/>
+                </a:solidFill>
+                <a:latin typeface="Arial" pitchFamily="34" charset="0"/>
+                <a:ea typeface="Arial" pitchFamily="34" charset="-122"/>
+                <a:cs typeface="Arial" pitchFamily="34" charset="-120"/>
+              </a:rPr>
+              <a:t>KEY POINT   </a:t>
+            </a:r>
+            <a:pPr indent="0" marL="0">
+              <a:lnSpc>
+                <a:spcPts val="2300"/>
+              </a:lnSpc>
+              <a:buNone/>
+            </a:pPr>
+            <a:r>
+              <a:rPr lang="en-US" sz="1600" dirty="0">
                 <a:solidFill>
                   <a:srgbClr val="24313F"/>
                 </a:solidFill>
@@ -6684,9 +6883,66 @@
                 <a:ea typeface="Georgia" pitchFamily="34" charset="-122"/>
                 <a:cs typeface="Georgia" pitchFamily="34" charset="-120"/>
               </a:rPr>
-              <a:t>A self-portrait is the maker studying the maker, and this one is a twenty-year-old art student doing exactly what the CCR asks of you: examining his own work-in-progress self without flattery. The CCR asks the same of you: not to describe the product, but to examine the person who made the choices. Add one honest sentence that flatters nobody. We chose the location because it was available, and it shows in the lighting. Honesty is what examiners read as reflection.</a:t>
-            </a:r>
-            <a:endParaRPr lang="en-US" sz="1700" dirty="0"/>
+              <a:t>A self-portrait is the maker studying the maker. Here, a twenty-year-old student examines his own unfinished self, without flattery.</a:t>
+            </a:r>
+            <a:endParaRPr lang="en-US" sz="1400" dirty="0"/>
+          </a:p>
+          <a:p>
+            <a:pPr indent="0" marL="0">
+              <a:lnSpc>
+                <a:spcPts val="2300"/>
+              </a:lnSpc>
+              <a:buNone/>
+            </a:pPr>
+            <a:r>
+              <a:rPr lang="en-US" sz="1600" dirty="0">
+                <a:solidFill>
+                  <a:srgbClr val="24313F"/>
+                </a:solidFill>
+                <a:latin typeface="Georgia" pitchFamily="34" charset="0"/>
+                <a:ea typeface="Georgia" pitchFamily="34" charset="-122"/>
+                <a:cs typeface="Georgia" pitchFamily="34" charset="-120"/>
+              </a:rPr>
+              <a:t>The CCR asks the same of you: examine the person who made the choices, not just the product.</a:t>
+            </a:r>
+            <a:endParaRPr lang="en-US" sz="1400" dirty="0"/>
+          </a:p>
+          <a:p>
+            <a:pPr indent="0" marL="0">
+              <a:lnSpc>
+                <a:spcPts val="2300"/>
+              </a:lnSpc>
+              <a:buNone/>
+            </a:pPr>
+            <a:r>
+              <a:rPr lang="en-US" sz="1400" b="1" spc="100" kern="0" dirty="0">
+                <a:solidFill>
+                  <a:srgbClr val="4A6B5D"/>
+                </a:solidFill>
+                <a:latin typeface="Arial" pitchFamily="34" charset="0"/>
+                <a:ea typeface="Arial" pitchFamily="34" charset="-122"/>
+                <a:cs typeface="Arial" pitchFamily="34" charset="-120"/>
+              </a:rPr>
+              <a:t>BE HONEST   </a:t>
+            </a:r>
+            <a:pPr indent="0" marL="0">
+              <a:lnSpc>
+                <a:spcPts val="2300"/>
+              </a:lnSpc>
+              <a:buNone/>
+            </a:pPr>
+            <a:r>
+              <a:rPr lang="en-US" sz="1600" dirty="0">
+                <a:solidFill>
+                  <a:srgbClr val="24313F"/>
+                </a:solidFill>
+                <a:latin typeface="Georgia" pitchFamily="34" charset="0"/>
+                <a:ea typeface="Georgia" pitchFamily="34" charset="-122"/>
+                <a:cs typeface="Georgia" pitchFamily="34" charset="-120"/>
+              </a:rPr>
+              <a:t>Add one sentence that flatters nobody: “We chose the location because it was free, and it shows in the lighting.” Examiners read honesty as reflection.</a:t>
+            </a:r>
+            <a:endParaRPr lang="en-US" sz="1400" dirty="0"/>
           </a:p>
         </p:txBody>
       </p:sp>
@@ -6908,12 +7164,29 @@
           <a:p>
             <a:pPr indent="0" marL="0">
               <a:lnSpc>
-                <a:spcPts val="2400"/>
+                <a:spcPts val="2300"/>
               </a:lnSpc>
               <a:buNone/>
             </a:pPr>
             <a:r>
-              <a:rPr lang="en-US" sz="1650" dirty="0">
+              <a:rPr lang="en-US" sz="1400" b="1" spc="100" kern="0" dirty="0">
+                <a:solidFill>
+                  <a:srgbClr val="4A6B5D"/>
+                </a:solidFill>
+                <a:latin typeface="Arial" pitchFamily="34" charset="0"/>
+                <a:ea typeface="Arial" pitchFamily="34" charset="-122"/>
+                <a:cs typeface="Arial" pitchFamily="34" charset="-120"/>
+              </a:rPr>
+              <a:t>TASK   </a:t>
+            </a:r>
+            <a:pPr indent="0" marL="0">
+              <a:lnSpc>
+                <a:spcPts val="2300"/>
+              </a:lnSpc>
+              <a:buNone/>
+            </a:pPr>
+            <a:r>
+              <a:rPr lang="en-US" sz="1600" dirty="0">
                 <a:solidFill>
                   <a:srgbClr val="24313F"/>
                 </a:solidFill>
@@ -6921,9 +7194,83 @@
                 <a:ea typeface="Georgia" pitchFamily="34" charset="-122"/>
                 <a:cs typeface="Georgia" pitchFamily="34" charset="-120"/>
               </a:rPr>
-              <a:t>Open the WS 6.4 diaries next to the drafts. Every entry in the decisions and consequences columns is already a reflection sentence: decided X because Y, consequence Z. This is why the lock's rule was documented decisions, not silent swaps. Transcribe the three best into the drafts.</a:t>
-            </a:r>
-            <a:endParaRPr lang="en-US" sz="1650" dirty="0"/>
+              <a:t>Open your WS 6.4 diary next to your draft.</a:t>
+            </a:r>
+            <a:endParaRPr lang="en-US" sz="1400" dirty="0"/>
+          </a:p>
+          <a:p>
+            <a:pPr indent="0" marL="0">
+              <a:lnSpc>
+                <a:spcPts val="2300"/>
+              </a:lnSpc>
+              <a:buNone/>
+            </a:pPr>
+            <a:r>
+              <a:rPr lang="en-US" sz="1400" b="1" spc="100" kern="0" dirty="0">
+                <a:solidFill>
+                  <a:srgbClr val="4A6B5D"/>
+                </a:solidFill>
+                <a:latin typeface="Arial" pitchFamily="34" charset="0"/>
+                <a:ea typeface="Arial" pitchFamily="34" charset="-122"/>
+                <a:cs typeface="Arial" pitchFamily="34" charset="-120"/>
+              </a:rPr>
+              <a:t>KEY POINT   </a:t>
+            </a:r>
+            <a:pPr indent="0" marL="0">
+              <a:lnSpc>
+                <a:spcPts val="2300"/>
+              </a:lnSpc>
+              <a:buNone/>
+            </a:pPr>
+            <a:r>
+              <a:rPr lang="en-US" sz="1600" dirty="0">
+                <a:solidFill>
+                  <a:srgbClr val="24313F"/>
+                </a:solidFill>
+                <a:latin typeface="Georgia" pitchFamily="34" charset="0"/>
+                <a:ea typeface="Georgia" pitchFamily="34" charset="-122"/>
+                <a:cs typeface="Georgia" pitchFamily="34" charset="-120"/>
+              </a:rPr>
+              <a:t>Every entry in the decisions and consequences columns is already a reflection sentence.</a:t>
+            </a:r>
+            <a:endParaRPr lang="en-US" sz="1400" dirty="0"/>
+          </a:p>
+          <a:p>
+            <a:pPr indent="0" marL="0">
+              <a:lnSpc>
+                <a:spcPts val="2300"/>
+              </a:lnSpc>
+              <a:buNone/>
+            </a:pPr>
+            <a:r>
+              <a:rPr lang="en-US" sz="1400" b="1" spc="100" kern="0" dirty="0">
+                <a:solidFill>
+                  <a:srgbClr val="4A6B5D"/>
+                </a:solidFill>
+                <a:latin typeface="Arial" pitchFamily="34" charset="0"/>
+                <a:ea typeface="Arial" pitchFamily="34" charset="-122"/>
+                <a:cs typeface="Arial" pitchFamily="34" charset="-120"/>
+              </a:rPr>
+              <a:t>DO   </a:t>
+            </a:r>
+            <a:pPr indent="0" marL="0">
+              <a:lnSpc>
+                <a:spcPts val="2300"/>
+              </a:lnSpc>
+              <a:buNone/>
+            </a:pPr>
+            <a:r>
+              <a:rPr lang="en-US" sz="1600" dirty="0">
+                <a:solidFill>
+                  <a:srgbClr val="24313F"/>
+                </a:solidFill>
+                <a:latin typeface="Georgia" pitchFamily="34" charset="0"/>
+                <a:ea typeface="Georgia" pitchFamily="34" charset="-122"/>
+                <a:cs typeface="Georgia" pitchFamily="34" charset="-120"/>
+              </a:rPr>
+              <a:t>Copy the three best entries into the draft.</a:t>
+            </a:r>
+            <a:endParaRPr lang="en-US" sz="1400" dirty="0"/>
           </a:p>
         </p:txBody>
       </p:sp>
